--- a/Gastos_Logistica_Capacitacion.pptx
+++ b/Gastos_Logistica_Capacitacion.pptx
@@ -13,6 +13,13 @@
     <p:sldId id="261" r:id="rId12"/>
     <p:sldId id="262" r:id="rId13"/>
     <p:sldId id="263" r:id="rId14"/>
+    <p:sldId id="264" r:id="rId15"/>
+    <p:sldId id="265" r:id="rId16"/>
+    <p:sldId id="266" r:id="rId17"/>
+    <p:sldId id="267" r:id="rId18"/>
+    <p:sldId id="268" r:id="rId19"/>
+    <p:sldId id="269" r:id="rId20"/>
+    <p:sldId id="270" r:id="rId21"/>
   </p:sldIdLst>
   <p:sldSz cx="12191695" cy="6858000" type="screen4x3"/>
   <p:notesSz cx="6858000" cy="9144000"/>
@@ -3583,7 +3590,7 @@
                 </a:solidFill>
                 <a:latin typeface="Segoe UI"/>
               </a:rPr>
-              <a:t>Escanea para entrar</a:t>
+              <a:t>App del chofer</a:t>
             </a:r>
           </a:p>
         </p:txBody>
@@ -3616,7 +3623,7 @@
               </a:lnSpc>
             </a:pPr>
             <a:r>
-              <a:rPr sz="1100" b="0">
+              <a:rPr sz="1000" b="0">
                 <a:solidFill>
                   <a:srgbClr val="34D399"/>
                 </a:solidFill>
@@ -3662,6 +3669,4071 @@
                 <a:latin typeface="Segoe UI"/>
               </a:rPr>
               <a:t>Transporte Logistico Internacional</a:t>
+            </a:r>
+          </a:p>
+        </p:txBody>
+      </p:sp>
+    </p:spTree>
+  </p:cSld>
+  <p:clrMapOvr>
+    <a:masterClrMapping/>
+  </p:clrMapOvr>
+</p:sld>
+</file>
+
+<file path=ppt/slides/slide10.xml><?xml version="1.0" encoding="utf-8"?>
+<p:sld xmlns:a="http://schemas.openxmlformats.org/drawingml/2006/main" xmlns:p="http://schemas.openxmlformats.org/presentationml/2006/main" xmlns:r="http://schemas.openxmlformats.org/officeDocument/2006/relationships">
+  <p:cSld>
+    <p:spTree>
+      <p:nvGrpSpPr>
+        <p:cNvPr id="1" name=""/>
+        <p:cNvGrpSpPr/>
+        <p:nvPr/>
+      </p:nvGrpSpPr>
+      <p:grpSpPr/>
+      <p:sp>
+        <p:nvSpPr>
+          <p:cNvPr id="2" name="Rectangle 1"/>
+          <p:cNvSpPr/>
+          <p:nvPr/>
+        </p:nvSpPr>
+        <p:spPr>
+          <a:xfrm>
+            <a:off x="0" y="0"/>
+            <a:ext cx="12191695" cy="6858000"/>
+          </a:xfrm>
+          <a:prstGeom prst="rect">
+            <a:avLst/>
+          </a:prstGeom>
+          <a:solidFill>
+            <a:srgbClr val="0F1117"/>
+          </a:solidFill>
+          <a:ln>
+            <a:noFill/>
+          </a:ln>
+          <a:effectLst/>
+        </p:spPr>
+        <p:style>
+          <a:lnRef idx="1">
+            <a:schemeClr val="accent1"/>
+          </a:lnRef>
+          <a:fillRef idx="3">
+            <a:schemeClr val="accent1"/>
+          </a:fillRef>
+          <a:effectRef idx="2">
+            <a:schemeClr val="accent1"/>
+          </a:effectRef>
+          <a:fontRef idx="minor">
+            <a:schemeClr val="lt1"/>
+          </a:fontRef>
+        </p:style>
+        <p:txBody>
+          <a:bodyPr rtlCol="0" anchor="ctr"/>
+          <a:lstStyle/>
+          <a:p>
+            <a:pPr algn="ctr"/>
+          </a:p>
+        </p:txBody>
+      </p:sp>
+      <p:sp>
+        <p:nvSpPr>
+          <p:cNvPr id="3" name="TextBox 2"/>
+          <p:cNvSpPr txBox="1"/>
+          <p:nvPr/>
+        </p:nvSpPr>
+        <p:spPr>
+          <a:xfrm>
+            <a:off x="777240" y="457200"/>
+            <a:ext cx="5486400" cy="329184"/>
+          </a:xfrm>
+          <a:prstGeom prst="rect">
+            <a:avLst/>
+          </a:prstGeom>
+          <a:noFill/>
+        </p:spPr>
+        <p:txBody>
+          <a:bodyPr wrap="square" anchor="t" lIns="0" rIns="0" tIns="0" bIns="0">
+            <a:spAutoFit/>
+          </a:bodyPr>
+          <a:lstStyle/>
+          <a:p>
+            <a:pPr algn="l">
+              <a:lnSpc>
+                <a:spcPct val="115000"/>
+              </a:lnSpc>
+            </a:pPr>
+            <a:r>
+              <a:rPr sz="1300" b="1">
+                <a:solidFill>
+                  <a:srgbClr val="34D399"/>
+                </a:solidFill>
+                <a:latin typeface="Segoe UI"/>
+              </a:rPr>
+              <a:t>PASO 6</a:t>
+            </a:r>
+          </a:p>
+        </p:txBody>
+      </p:sp>
+      <p:sp>
+        <p:nvSpPr>
+          <p:cNvPr id="4" name="TextBox 3"/>
+          <p:cNvSpPr txBox="1"/>
+          <p:nvPr/>
+        </p:nvSpPr>
+        <p:spPr>
+          <a:xfrm>
+            <a:off x="777240" y="804672"/>
+            <a:ext cx="7315200" cy="640080"/>
+          </a:xfrm>
+          <a:prstGeom prst="rect">
+            <a:avLst/>
+          </a:prstGeom>
+          <a:noFill/>
+        </p:spPr>
+        <p:txBody>
+          <a:bodyPr wrap="square" anchor="t" lIns="0" rIns="0" tIns="0" bIns="0">
+            <a:spAutoFit/>
+          </a:bodyPr>
+          <a:lstStyle/>
+          <a:p>
+            <a:pPr algn="l">
+              <a:lnSpc>
+                <a:spcPct val="115000"/>
+              </a:lnSpc>
+            </a:pPr>
+            <a:r>
+              <a:rPr sz="3300" b="1">
+                <a:solidFill>
+                  <a:srgbClr val="FFFFFF"/>
+                </a:solidFill>
+                <a:latin typeface="Segoe UI"/>
+              </a:rPr>
+              <a:t>Entrar al panel</a:t>
+            </a:r>
+          </a:p>
+        </p:txBody>
+      </p:sp>
+      <p:sp>
+        <p:nvSpPr>
+          <p:cNvPr id="5" name="TextBox 4"/>
+          <p:cNvSpPr txBox="1"/>
+          <p:nvPr/>
+        </p:nvSpPr>
+        <p:spPr>
+          <a:xfrm>
+            <a:off x="777240" y="1481328"/>
+            <a:ext cx="7863840" cy="411480"/>
+          </a:xfrm>
+          <a:prstGeom prst="rect">
+            <a:avLst/>
+          </a:prstGeom>
+          <a:noFill/>
+        </p:spPr>
+        <p:txBody>
+          <a:bodyPr wrap="square" anchor="t" lIns="0" rIns="0" tIns="0" bIns="0">
+            <a:spAutoFit/>
+          </a:bodyPr>
+          <a:lstStyle/>
+          <a:p>
+            <a:pPr algn="l">
+              <a:lnSpc>
+                <a:spcPct val="115000"/>
+              </a:lnSpc>
+            </a:pPr>
+            <a:r>
+              <a:rPr sz="1600" b="0">
+                <a:solidFill>
+                  <a:srgbClr val="9CA3AF"/>
+                </a:solidFill>
+                <a:latin typeface="Segoe UI"/>
+              </a:rPr>
+              <a:t>Se accede desde /admin, con usuario y contrasena propios.</a:t>
+            </a:r>
+          </a:p>
+        </p:txBody>
+      </p:sp>
+      <p:sp>
+        <p:nvSpPr>
+          <p:cNvPr id="6" name="Rounded Rectangle 5"/>
+          <p:cNvSpPr/>
+          <p:nvPr/>
+        </p:nvSpPr>
+        <p:spPr>
+          <a:xfrm>
+            <a:off x="731520" y="1993392"/>
+            <a:ext cx="7772400" cy="4645152"/>
+          </a:xfrm>
+          <a:prstGeom prst="roundRect">
+            <a:avLst>
+              <a:gd name="adj" fmla="val 6000"/>
+            </a:avLst>
+          </a:prstGeom>
+          <a:solidFill>
+            <a:srgbClr val="0A0C10"/>
+          </a:solidFill>
+          <a:ln w="12700">
+            <a:solidFill>
+              <a:srgbClr val="2E3442"/>
+            </a:solidFill>
+          </a:ln>
+          <a:effectLst/>
+        </p:spPr>
+        <p:style>
+          <a:lnRef idx="1">
+            <a:schemeClr val="accent1"/>
+          </a:lnRef>
+          <a:fillRef idx="3">
+            <a:schemeClr val="accent1"/>
+          </a:fillRef>
+          <a:effectRef idx="2">
+            <a:schemeClr val="accent1"/>
+          </a:effectRef>
+          <a:fontRef idx="minor">
+            <a:schemeClr val="lt1"/>
+          </a:fontRef>
+        </p:style>
+        <p:txBody>
+          <a:bodyPr rtlCol="0" anchor="ctr"/>
+          <a:lstStyle/>
+          <a:p/>
+        </p:txBody>
+      </p:sp>
+      <p:pic>
+        <p:nvPicPr>
+          <p:cNvPr id="7" name="Picture 6" descr="06_admin_login.png"/>
+          <p:cNvPicPr>
+            <a:picLocks noChangeAspect="1"/>
+          </p:cNvPicPr>
+          <p:nvPr/>
+        </p:nvPicPr>
+        <p:blipFill>
+          <a:blip r:embed="rId2"/>
+          <a:stretch>
+            <a:fillRect/>
+          </a:stretch>
+        </p:blipFill>
+        <p:spPr>
+          <a:xfrm>
+            <a:off x="777240" y="2039112"/>
+            <a:ext cx="7680960" cy="4553712"/>
+          </a:xfrm>
+          <a:prstGeom prst="rect">
+            <a:avLst/>
+          </a:prstGeom>
+        </p:spPr>
+      </p:pic>
+      <p:sp>
+        <p:nvSpPr>
+          <p:cNvPr id="8" name="Oval 7"/>
+          <p:cNvSpPr/>
+          <p:nvPr/>
+        </p:nvSpPr>
+        <p:spPr>
+          <a:xfrm>
+            <a:off x="8732520" y="2258568"/>
+            <a:ext cx="109728" cy="109728"/>
+          </a:xfrm>
+          <a:prstGeom prst="ellipse">
+            <a:avLst/>
+          </a:prstGeom>
+          <a:solidFill>
+            <a:srgbClr val="34D399"/>
+          </a:solidFill>
+          <a:ln>
+            <a:noFill/>
+          </a:ln>
+          <a:effectLst/>
+        </p:spPr>
+        <p:style>
+          <a:lnRef idx="1">
+            <a:schemeClr val="accent1"/>
+          </a:lnRef>
+          <a:fillRef idx="3">
+            <a:schemeClr val="accent1"/>
+          </a:fillRef>
+          <a:effectRef idx="2">
+            <a:schemeClr val="accent1"/>
+          </a:effectRef>
+          <a:fontRef idx="minor">
+            <a:schemeClr val="lt1"/>
+          </a:fontRef>
+        </p:style>
+        <p:txBody>
+          <a:bodyPr rtlCol="0" anchor="ctr"/>
+          <a:lstStyle/>
+          <a:p>
+            <a:pPr algn="ctr"/>
+          </a:p>
+        </p:txBody>
+      </p:sp>
+      <p:sp>
+        <p:nvSpPr>
+          <p:cNvPr id="9" name="TextBox 8"/>
+          <p:cNvSpPr txBox="1"/>
+          <p:nvPr/>
+        </p:nvSpPr>
+        <p:spPr>
+          <a:xfrm>
+            <a:off x="9034272" y="2148840"/>
+            <a:ext cx="2514600" cy="822960"/>
+          </a:xfrm>
+          <a:prstGeom prst="rect">
+            <a:avLst/>
+          </a:prstGeom>
+          <a:noFill/>
+        </p:spPr>
+        <p:txBody>
+          <a:bodyPr wrap="square" anchor="t" lIns="0" rIns="0" tIns="0" bIns="0">
+            <a:spAutoFit/>
+          </a:bodyPr>
+          <a:lstStyle/>
+          <a:p>
+            <a:pPr algn="l">
+              <a:lnSpc>
+                <a:spcPct val="130000"/>
+              </a:lnSpc>
+            </a:pPr>
+            <a:r>
+              <a:rPr sz="1300" b="0">
+                <a:solidFill>
+                  <a:srgbClr val="9CA3AF"/>
+                </a:solidFill>
+                <a:latin typeface="Segoe UI"/>
+              </a:rPr>
+              <a:t>Es una pantalla aparte de la del chofer</a:t>
+            </a:r>
+          </a:p>
+        </p:txBody>
+      </p:sp>
+      <p:sp>
+        <p:nvSpPr>
+          <p:cNvPr id="10" name="Oval 9"/>
+          <p:cNvSpPr/>
+          <p:nvPr/>
+        </p:nvSpPr>
+        <p:spPr>
+          <a:xfrm>
+            <a:off x="8732520" y="3008376"/>
+            <a:ext cx="109728" cy="109728"/>
+          </a:xfrm>
+          <a:prstGeom prst="ellipse">
+            <a:avLst/>
+          </a:prstGeom>
+          <a:solidFill>
+            <a:srgbClr val="34D399"/>
+          </a:solidFill>
+          <a:ln>
+            <a:noFill/>
+          </a:ln>
+          <a:effectLst/>
+        </p:spPr>
+        <p:style>
+          <a:lnRef idx="1">
+            <a:schemeClr val="accent1"/>
+          </a:lnRef>
+          <a:fillRef idx="3">
+            <a:schemeClr val="accent1"/>
+          </a:fillRef>
+          <a:effectRef idx="2">
+            <a:schemeClr val="accent1"/>
+          </a:effectRef>
+          <a:fontRef idx="minor">
+            <a:schemeClr val="lt1"/>
+          </a:fontRef>
+        </p:style>
+        <p:txBody>
+          <a:bodyPr rtlCol="0" anchor="ctr"/>
+          <a:lstStyle/>
+          <a:p>
+            <a:pPr algn="ctr"/>
+          </a:p>
+        </p:txBody>
+      </p:sp>
+      <p:sp>
+        <p:nvSpPr>
+          <p:cNvPr id="11" name="TextBox 10"/>
+          <p:cNvSpPr txBox="1"/>
+          <p:nvPr/>
+        </p:nvSpPr>
+        <p:spPr>
+          <a:xfrm>
+            <a:off x="9034272" y="2898648"/>
+            <a:ext cx="2514600" cy="822960"/>
+          </a:xfrm>
+          <a:prstGeom prst="rect">
+            <a:avLst/>
+          </a:prstGeom>
+          <a:noFill/>
+        </p:spPr>
+        <p:txBody>
+          <a:bodyPr wrap="square" anchor="t" lIns="0" rIns="0" tIns="0" bIns="0">
+            <a:spAutoFit/>
+          </a:bodyPr>
+          <a:lstStyle/>
+          <a:p>
+            <a:pPr algn="l">
+              <a:lnSpc>
+                <a:spcPct val="130000"/>
+              </a:lnSpc>
+            </a:pPr>
+            <a:r>
+              <a:rPr sz="1300" b="0">
+                <a:solidFill>
+                  <a:srgbClr val="9CA3AF"/>
+                </a:solidFill>
+                <a:latin typeface="Segoe UI"/>
+              </a:rPr>
+              <a:t>Solo para el area administrativa</a:t>
+            </a:r>
+          </a:p>
+        </p:txBody>
+      </p:sp>
+      <p:sp>
+        <p:nvSpPr>
+          <p:cNvPr id="12" name="Oval 11"/>
+          <p:cNvSpPr/>
+          <p:nvPr/>
+        </p:nvSpPr>
+        <p:spPr>
+          <a:xfrm>
+            <a:off x="8732520" y="3758184"/>
+            <a:ext cx="109728" cy="109728"/>
+          </a:xfrm>
+          <a:prstGeom prst="ellipse">
+            <a:avLst/>
+          </a:prstGeom>
+          <a:solidFill>
+            <a:srgbClr val="34D399"/>
+          </a:solidFill>
+          <a:ln>
+            <a:noFill/>
+          </a:ln>
+          <a:effectLst/>
+        </p:spPr>
+        <p:style>
+          <a:lnRef idx="1">
+            <a:schemeClr val="accent1"/>
+          </a:lnRef>
+          <a:fillRef idx="3">
+            <a:schemeClr val="accent1"/>
+          </a:fillRef>
+          <a:effectRef idx="2">
+            <a:schemeClr val="accent1"/>
+          </a:effectRef>
+          <a:fontRef idx="minor">
+            <a:schemeClr val="lt1"/>
+          </a:fontRef>
+        </p:style>
+        <p:txBody>
+          <a:bodyPr rtlCol="0" anchor="ctr"/>
+          <a:lstStyle/>
+          <a:p>
+            <a:pPr algn="ctr"/>
+          </a:p>
+        </p:txBody>
+      </p:sp>
+      <p:sp>
+        <p:nvSpPr>
+          <p:cNvPr id="13" name="TextBox 12"/>
+          <p:cNvSpPr txBox="1"/>
+          <p:nvPr/>
+        </p:nvSpPr>
+        <p:spPr>
+          <a:xfrm>
+            <a:off x="9034272" y="3648456"/>
+            <a:ext cx="2514600" cy="822960"/>
+          </a:xfrm>
+          <a:prstGeom prst="rect">
+            <a:avLst/>
+          </a:prstGeom>
+          <a:noFill/>
+        </p:spPr>
+        <p:txBody>
+          <a:bodyPr wrap="square" anchor="t" lIns="0" rIns="0" tIns="0" bIns="0">
+            <a:spAutoFit/>
+          </a:bodyPr>
+          <a:lstStyle/>
+          <a:p>
+            <a:pPr algn="l">
+              <a:lnSpc>
+                <a:spcPct val="130000"/>
+              </a:lnSpc>
+            </a:pPr>
+            <a:r>
+              <a:rPr sz="1300" b="0">
+                <a:solidFill>
+                  <a:srgbClr val="9CA3AF"/>
+                </a:solidFill>
+                <a:latin typeface="Segoe UI"/>
+              </a:rPr>
+              <a:t>Se entra por /admin/login (o con el QR)</a:t>
+            </a:r>
+          </a:p>
+        </p:txBody>
+      </p:sp>
+      <p:sp>
+        <p:nvSpPr>
+          <p:cNvPr id="14" name="Oval 13"/>
+          <p:cNvSpPr/>
+          <p:nvPr/>
+        </p:nvSpPr>
+        <p:spPr>
+          <a:xfrm>
+            <a:off x="8732520" y="4507992"/>
+            <a:ext cx="109728" cy="109728"/>
+          </a:xfrm>
+          <a:prstGeom prst="ellipse">
+            <a:avLst/>
+          </a:prstGeom>
+          <a:solidFill>
+            <a:srgbClr val="34D399"/>
+          </a:solidFill>
+          <a:ln>
+            <a:noFill/>
+          </a:ln>
+          <a:effectLst/>
+        </p:spPr>
+        <p:style>
+          <a:lnRef idx="1">
+            <a:schemeClr val="accent1"/>
+          </a:lnRef>
+          <a:fillRef idx="3">
+            <a:schemeClr val="accent1"/>
+          </a:fillRef>
+          <a:effectRef idx="2">
+            <a:schemeClr val="accent1"/>
+          </a:effectRef>
+          <a:fontRef idx="minor">
+            <a:schemeClr val="lt1"/>
+          </a:fontRef>
+        </p:style>
+        <p:txBody>
+          <a:bodyPr rtlCol="0" anchor="ctr"/>
+          <a:lstStyle/>
+          <a:p>
+            <a:pPr algn="ctr"/>
+          </a:p>
+        </p:txBody>
+      </p:sp>
+      <p:sp>
+        <p:nvSpPr>
+          <p:cNvPr id="15" name="TextBox 14"/>
+          <p:cNvSpPr txBox="1"/>
+          <p:nvPr/>
+        </p:nvSpPr>
+        <p:spPr>
+          <a:xfrm>
+            <a:off x="9034272" y="4398264"/>
+            <a:ext cx="2514600" cy="822960"/>
+          </a:xfrm>
+          <a:prstGeom prst="rect">
+            <a:avLst/>
+          </a:prstGeom>
+          <a:noFill/>
+        </p:spPr>
+        <p:txBody>
+          <a:bodyPr wrap="square" anchor="t" lIns="0" rIns="0" tIns="0" bIns="0">
+            <a:spAutoFit/>
+          </a:bodyPr>
+          <a:lstStyle/>
+          <a:p>
+            <a:pPr algn="l">
+              <a:lnSpc>
+                <a:spcPct val="130000"/>
+              </a:lnSpc>
+            </a:pPr>
+            <a:r>
+              <a:rPr sz="1300" b="0">
+                <a:solidFill>
+                  <a:srgbClr val="9CA3AF"/>
+                </a:solidFill>
+                <a:latin typeface="Segoe UI"/>
+              </a:rPr>
+              <a:t>Se cierra con el boton Salir</a:t>
+            </a:r>
+          </a:p>
+        </p:txBody>
+      </p:sp>
+      <p:sp>
+        <p:nvSpPr>
+          <p:cNvPr id="16" name="Rounded Rectangle 15"/>
+          <p:cNvSpPr/>
+          <p:nvPr/>
+        </p:nvSpPr>
+        <p:spPr>
+          <a:xfrm>
+            <a:off x="8686800" y="5532120"/>
+            <a:ext cx="2880360" cy="868680"/>
+          </a:xfrm>
+          <a:prstGeom prst="roundRect">
+            <a:avLst>
+              <a:gd name="adj" fmla="val 6000"/>
+            </a:avLst>
+          </a:prstGeom>
+          <a:solidFill>
+            <a:srgbClr val="161A22"/>
+          </a:solidFill>
+          <a:ln w="12700">
+            <a:solidFill>
+              <a:srgbClr val="60A5FA"/>
+            </a:solidFill>
+          </a:ln>
+          <a:effectLst/>
+        </p:spPr>
+        <p:style>
+          <a:lnRef idx="1">
+            <a:schemeClr val="accent1"/>
+          </a:lnRef>
+          <a:fillRef idx="3">
+            <a:schemeClr val="accent1"/>
+          </a:fillRef>
+          <a:effectRef idx="2">
+            <a:schemeClr val="accent1"/>
+          </a:effectRef>
+          <a:fontRef idx="minor">
+            <a:schemeClr val="lt1"/>
+          </a:fontRef>
+        </p:style>
+        <p:txBody>
+          <a:bodyPr rtlCol="0" anchor="ctr"/>
+          <a:lstStyle/>
+          <a:p/>
+        </p:txBody>
+      </p:sp>
+      <p:sp>
+        <p:nvSpPr>
+          <p:cNvPr id="17" name="TextBox 16"/>
+          <p:cNvSpPr txBox="1"/>
+          <p:nvPr/>
+        </p:nvSpPr>
+        <p:spPr>
+          <a:xfrm>
+            <a:off x="8915400" y="5705856"/>
+            <a:ext cx="2468880" cy="548640"/>
+          </a:xfrm>
+          <a:prstGeom prst="rect">
+            <a:avLst/>
+          </a:prstGeom>
+          <a:noFill/>
+        </p:spPr>
+        <p:txBody>
+          <a:bodyPr wrap="square" anchor="t" lIns="0" rIns="0" tIns="0" bIns="0">
+            <a:spAutoFit/>
+          </a:bodyPr>
+          <a:lstStyle/>
+          <a:p>
+            <a:pPr algn="l">
+              <a:lnSpc>
+                <a:spcPct val="125000"/>
+              </a:lnSpc>
+            </a:pPr>
+            <a:r>
+              <a:rPr sz="1100" b="1">
+                <a:solidFill>
+                  <a:srgbClr val="60A5FA"/>
+                </a:solidFill>
+                <a:latin typeface="Segoe UI"/>
+              </a:rPr>
+              <a:t>El chofer nunca ve este panel ni los datos de otros choferes.</a:t>
+            </a:r>
+          </a:p>
+        </p:txBody>
+      </p:sp>
+    </p:spTree>
+  </p:cSld>
+  <p:clrMapOvr>
+    <a:masterClrMapping/>
+  </p:clrMapOvr>
+</p:sld>
+</file>
+
+<file path=ppt/slides/slide11.xml><?xml version="1.0" encoding="utf-8"?>
+<p:sld xmlns:a="http://schemas.openxmlformats.org/drawingml/2006/main" xmlns:p="http://schemas.openxmlformats.org/presentationml/2006/main" xmlns:r="http://schemas.openxmlformats.org/officeDocument/2006/relationships">
+  <p:cSld>
+    <p:spTree>
+      <p:nvGrpSpPr>
+        <p:cNvPr id="1" name=""/>
+        <p:cNvGrpSpPr/>
+        <p:nvPr/>
+      </p:nvGrpSpPr>
+      <p:grpSpPr/>
+      <p:sp>
+        <p:nvSpPr>
+          <p:cNvPr id="2" name="Rectangle 1"/>
+          <p:cNvSpPr/>
+          <p:nvPr/>
+        </p:nvSpPr>
+        <p:spPr>
+          <a:xfrm>
+            <a:off x="0" y="0"/>
+            <a:ext cx="12191695" cy="6858000"/>
+          </a:xfrm>
+          <a:prstGeom prst="rect">
+            <a:avLst/>
+          </a:prstGeom>
+          <a:solidFill>
+            <a:srgbClr val="0F1117"/>
+          </a:solidFill>
+          <a:ln>
+            <a:noFill/>
+          </a:ln>
+          <a:effectLst/>
+        </p:spPr>
+        <p:style>
+          <a:lnRef idx="1">
+            <a:schemeClr val="accent1"/>
+          </a:lnRef>
+          <a:fillRef idx="3">
+            <a:schemeClr val="accent1"/>
+          </a:fillRef>
+          <a:effectRef idx="2">
+            <a:schemeClr val="accent1"/>
+          </a:effectRef>
+          <a:fontRef idx="minor">
+            <a:schemeClr val="lt1"/>
+          </a:fontRef>
+        </p:style>
+        <p:txBody>
+          <a:bodyPr rtlCol="0" anchor="ctr"/>
+          <a:lstStyle/>
+          <a:p>
+            <a:pPr algn="ctr"/>
+          </a:p>
+        </p:txBody>
+      </p:sp>
+      <p:sp>
+        <p:nvSpPr>
+          <p:cNvPr id="3" name="TextBox 2"/>
+          <p:cNvSpPr txBox="1"/>
+          <p:nvPr/>
+        </p:nvSpPr>
+        <p:spPr>
+          <a:xfrm>
+            <a:off x="777240" y="457200"/>
+            <a:ext cx="5486400" cy="329184"/>
+          </a:xfrm>
+          <a:prstGeom prst="rect">
+            <a:avLst/>
+          </a:prstGeom>
+          <a:noFill/>
+        </p:spPr>
+        <p:txBody>
+          <a:bodyPr wrap="square" anchor="t" lIns="0" rIns="0" tIns="0" bIns="0">
+            <a:spAutoFit/>
+          </a:bodyPr>
+          <a:lstStyle/>
+          <a:p>
+            <a:pPr algn="l">
+              <a:lnSpc>
+                <a:spcPct val="115000"/>
+              </a:lnSpc>
+            </a:pPr>
+            <a:r>
+              <a:rPr sz="1300" b="1">
+                <a:solidFill>
+                  <a:srgbClr val="34D399"/>
+                </a:solidFill>
+                <a:latin typeface="Segoe UI"/>
+              </a:rPr>
+              <a:t>PASO 7</a:t>
+            </a:r>
+          </a:p>
+        </p:txBody>
+      </p:sp>
+      <p:sp>
+        <p:nvSpPr>
+          <p:cNvPr id="4" name="TextBox 3"/>
+          <p:cNvSpPr txBox="1"/>
+          <p:nvPr/>
+        </p:nvSpPr>
+        <p:spPr>
+          <a:xfrm>
+            <a:off x="777240" y="804672"/>
+            <a:ext cx="7315200" cy="640080"/>
+          </a:xfrm>
+          <a:prstGeom prst="rect">
+            <a:avLst/>
+          </a:prstGeom>
+          <a:noFill/>
+        </p:spPr>
+        <p:txBody>
+          <a:bodyPr wrap="square" anchor="t" lIns="0" rIns="0" tIns="0" bIns="0">
+            <a:spAutoFit/>
+          </a:bodyPr>
+          <a:lstStyle/>
+          <a:p>
+            <a:pPr algn="l">
+              <a:lnSpc>
+                <a:spcPct val="115000"/>
+              </a:lnSpc>
+            </a:pPr>
+            <a:r>
+              <a:rPr sz="3300" b="1">
+                <a:solidFill>
+                  <a:srgbClr val="FFFFFF"/>
+                </a:solidFill>
+                <a:latin typeface="Segoe UI"/>
+              </a:rPr>
+              <a:t>La lista de rendiciones</a:t>
+            </a:r>
+          </a:p>
+        </p:txBody>
+      </p:sp>
+      <p:sp>
+        <p:nvSpPr>
+          <p:cNvPr id="5" name="TextBox 4"/>
+          <p:cNvSpPr txBox="1"/>
+          <p:nvPr/>
+        </p:nvSpPr>
+        <p:spPr>
+          <a:xfrm>
+            <a:off x="777240" y="1481328"/>
+            <a:ext cx="7863840" cy="411480"/>
+          </a:xfrm>
+          <a:prstGeom prst="rect">
+            <a:avLst/>
+          </a:prstGeom>
+          <a:noFill/>
+        </p:spPr>
+        <p:txBody>
+          <a:bodyPr wrap="square" anchor="t" lIns="0" rIns="0" tIns="0" bIns="0">
+            <a:spAutoFit/>
+          </a:bodyPr>
+          <a:lstStyle/>
+          <a:p>
+            <a:pPr algn="l">
+              <a:lnSpc>
+                <a:spcPct val="115000"/>
+              </a:lnSpc>
+            </a:pPr>
+            <a:r>
+              <a:rPr sz="1600" b="0">
+                <a:solidFill>
+                  <a:srgbClr val="9CA3AF"/>
+                </a:solidFill>
+                <a:latin typeface="Segoe UI"/>
+              </a:rPr>
+              <a:t>De un vistazo: cuantas hay, cuales faltan revisar y cuanto suman.</a:t>
+            </a:r>
+          </a:p>
+        </p:txBody>
+      </p:sp>
+      <p:sp>
+        <p:nvSpPr>
+          <p:cNvPr id="6" name="Rounded Rectangle 5"/>
+          <p:cNvSpPr/>
+          <p:nvPr/>
+        </p:nvSpPr>
+        <p:spPr>
+          <a:xfrm>
+            <a:off x="731520" y="1993392"/>
+            <a:ext cx="7772400" cy="3840479"/>
+          </a:xfrm>
+          <a:prstGeom prst="roundRect">
+            <a:avLst>
+              <a:gd name="adj" fmla="val 6000"/>
+            </a:avLst>
+          </a:prstGeom>
+          <a:solidFill>
+            <a:srgbClr val="0A0C10"/>
+          </a:solidFill>
+          <a:ln w="12700">
+            <a:solidFill>
+              <a:srgbClr val="2E3442"/>
+            </a:solidFill>
+          </a:ln>
+          <a:effectLst/>
+        </p:spPr>
+        <p:style>
+          <a:lnRef idx="1">
+            <a:schemeClr val="accent1"/>
+          </a:lnRef>
+          <a:fillRef idx="3">
+            <a:schemeClr val="accent1"/>
+          </a:fillRef>
+          <a:effectRef idx="2">
+            <a:schemeClr val="accent1"/>
+          </a:effectRef>
+          <a:fontRef idx="minor">
+            <a:schemeClr val="lt1"/>
+          </a:fontRef>
+        </p:style>
+        <p:txBody>
+          <a:bodyPr rtlCol="0" anchor="ctr"/>
+          <a:lstStyle/>
+          <a:p/>
+        </p:txBody>
+      </p:sp>
+      <p:pic>
+        <p:nvPicPr>
+          <p:cNvPr id="7" name="Picture 6" descr="07_admin_lista.png"/>
+          <p:cNvPicPr>
+            <a:picLocks noChangeAspect="1"/>
+          </p:cNvPicPr>
+          <p:nvPr/>
+        </p:nvPicPr>
+        <p:blipFill>
+          <a:blip r:embed="rId2"/>
+          <a:stretch>
+            <a:fillRect/>
+          </a:stretch>
+        </p:blipFill>
+        <p:spPr>
+          <a:xfrm>
+            <a:off x="777240" y="2039112"/>
+            <a:ext cx="7680960" cy="3749039"/>
+          </a:xfrm>
+          <a:prstGeom prst="rect">
+            <a:avLst/>
+          </a:prstGeom>
+        </p:spPr>
+      </p:pic>
+      <p:sp>
+        <p:nvSpPr>
+          <p:cNvPr id="8" name="Oval 7"/>
+          <p:cNvSpPr/>
+          <p:nvPr/>
+        </p:nvSpPr>
+        <p:spPr>
+          <a:xfrm>
+            <a:off x="8732520" y="2258568"/>
+            <a:ext cx="109728" cy="109728"/>
+          </a:xfrm>
+          <a:prstGeom prst="ellipse">
+            <a:avLst/>
+          </a:prstGeom>
+          <a:solidFill>
+            <a:srgbClr val="34D399"/>
+          </a:solidFill>
+          <a:ln>
+            <a:noFill/>
+          </a:ln>
+          <a:effectLst/>
+        </p:spPr>
+        <p:style>
+          <a:lnRef idx="1">
+            <a:schemeClr val="accent1"/>
+          </a:lnRef>
+          <a:fillRef idx="3">
+            <a:schemeClr val="accent1"/>
+          </a:fillRef>
+          <a:effectRef idx="2">
+            <a:schemeClr val="accent1"/>
+          </a:effectRef>
+          <a:fontRef idx="minor">
+            <a:schemeClr val="lt1"/>
+          </a:fontRef>
+        </p:style>
+        <p:txBody>
+          <a:bodyPr rtlCol="0" anchor="ctr"/>
+          <a:lstStyle/>
+          <a:p>
+            <a:pPr algn="ctr"/>
+          </a:p>
+        </p:txBody>
+      </p:sp>
+      <p:sp>
+        <p:nvSpPr>
+          <p:cNvPr id="9" name="TextBox 8"/>
+          <p:cNvSpPr txBox="1"/>
+          <p:nvPr/>
+        </p:nvSpPr>
+        <p:spPr>
+          <a:xfrm>
+            <a:off x="9034272" y="2148840"/>
+            <a:ext cx="2514600" cy="822960"/>
+          </a:xfrm>
+          <a:prstGeom prst="rect">
+            <a:avLst/>
+          </a:prstGeom>
+          <a:noFill/>
+        </p:spPr>
+        <p:txBody>
+          <a:bodyPr wrap="square" anchor="t" lIns="0" rIns="0" tIns="0" bIns="0">
+            <a:spAutoFit/>
+          </a:bodyPr>
+          <a:lstStyle/>
+          <a:p>
+            <a:pPr algn="l">
+              <a:lnSpc>
+                <a:spcPct val="130000"/>
+              </a:lnSpc>
+            </a:pPr>
+            <a:r>
+              <a:rPr sz="1300" b="0">
+                <a:solidFill>
+                  <a:srgbClr val="9CA3AF"/>
+                </a:solidFill>
+                <a:latin typeface="Segoe UI"/>
+              </a:rPr>
+              <a:t>Solo aparecen los viajes que tienen gastos cargados</a:t>
+            </a:r>
+          </a:p>
+        </p:txBody>
+      </p:sp>
+      <p:sp>
+        <p:nvSpPr>
+          <p:cNvPr id="10" name="Oval 9"/>
+          <p:cNvSpPr/>
+          <p:nvPr/>
+        </p:nvSpPr>
+        <p:spPr>
+          <a:xfrm>
+            <a:off x="8732520" y="3008376"/>
+            <a:ext cx="109728" cy="109728"/>
+          </a:xfrm>
+          <a:prstGeom prst="ellipse">
+            <a:avLst/>
+          </a:prstGeom>
+          <a:solidFill>
+            <a:srgbClr val="34D399"/>
+          </a:solidFill>
+          <a:ln>
+            <a:noFill/>
+          </a:ln>
+          <a:effectLst/>
+        </p:spPr>
+        <p:style>
+          <a:lnRef idx="1">
+            <a:schemeClr val="accent1"/>
+          </a:lnRef>
+          <a:fillRef idx="3">
+            <a:schemeClr val="accent1"/>
+          </a:fillRef>
+          <a:effectRef idx="2">
+            <a:schemeClr val="accent1"/>
+          </a:effectRef>
+          <a:fontRef idx="minor">
+            <a:schemeClr val="lt1"/>
+          </a:fontRef>
+        </p:style>
+        <p:txBody>
+          <a:bodyPr rtlCol="0" anchor="ctr"/>
+          <a:lstStyle/>
+          <a:p>
+            <a:pPr algn="ctr"/>
+          </a:p>
+        </p:txBody>
+      </p:sp>
+      <p:sp>
+        <p:nvSpPr>
+          <p:cNvPr id="11" name="TextBox 10"/>
+          <p:cNvSpPr txBox="1"/>
+          <p:nvPr/>
+        </p:nvSpPr>
+        <p:spPr>
+          <a:xfrm>
+            <a:off x="9034272" y="2898648"/>
+            <a:ext cx="2514600" cy="822960"/>
+          </a:xfrm>
+          <a:prstGeom prst="rect">
+            <a:avLst/>
+          </a:prstGeom>
+          <a:noFill/>
+        </p:spPr>
+        <p:txBody>
+          <a:bodyPr wrap="square" anchor="t" lIns="0" rIns="0" tIns="0" bIns="0">
+            <a:spAutoFit/>
+          </a:bodyPr>
+          <a:lstStyle/>
+          <a:p>
+            <a:pPr algn="l">
+              <a:lnSpc>
+                <a:spcPct val="130000"/>
+              </a:lnSpc>
+            </a:pPr>
+            <a:r>
+              <a:rPr sz="1300" b="0">
+                <a:solidFill>
+                  <a:srgbClr val="9CA3AF"/>
+                </a:solidFill>
+                <a:latin typeface="Segoe UI"/>
+              </a:rPr>
+              <a:t>Amarillo = pendiente,  verde = ya aprobada</a:t>
+            </a:r>
+          </a:p>
+        </p:txBody>
+      </p:sp>
+      <p:sp>
+        <p:nvSpPr>
+          <p:cNvPr id="12" name="Oval 11"/>
+          <p:cNvSpPr/>
+          <p:nvPr/>
+        </p:nvSpPr>
+        <p:spPr>
+          <a:xfrm>
+            <a:off x="8732520" y="3758184"/>
+            <a:ext cx="109728" cy="109728"/>
+          </a:xfrm>
+          <a:prstGeom prst="ellipse">
+            <a:avLst/>
+          </a:prstGeom>
+          <a:solidFill>
+            <a:srgbClr val="34D399"/>
+          </a:solidFill>
+          <a:ln>
+            <a:noFill/>
+          </a:ln>
+          <a:effectLst/>
+        </p:spPr>
+        <p:style>
+          <a:lnRef idx="1">
+            <a:schemeClr val="accent1"/>
+          </a:lnRef>
+          <a:fillRef idx="3">
+            <a:schemeClr val="accent1"/>
+          </a:fillRef>
+          <a:effectRef idx="2">
+            <a:schemeClr val="accent1"/>
+          </a:effectRef>
+          <a:fontRef idx="minor">
+            <a:schemeClr val="lt1"/>
+          </a:fontRef>
+        </p:style>
+        <p:txBody>
+          <a:bodyPr rtlCol="0" anchor="ctr"/>
+          <a:lstStyle/>
+          <a:p>
+            <a:pPr algn="ctr"/>
+          </a:p>
+        </p:txBody>
+      </p:sp>
+      <p:sp>
+        <p:nvSpPr>
+          <p:cNvPr id="13" name="TextBox 12"/>
+          <p:cNvSpPr txBox="1"/>
+          <p:nvPr/>
+        </p:nvSpPr>
+        <p:spPr>
+          <a:xfrm>
+            <a:off x="9034272" y="3648456"/>
+            <a:ext cx="2514600" cy="822960"/>
+          </a:xfrm>
+          <a:prstGeom prst="rect">
+            <a:avLst/>
+          </a:prstGeom>
+          <a:noFill/>
+        </p:spPr>
+        <p:txBody>
+          <a:bodyPr wrap="square" anchor="t" lIns="0" rIns="0" tIns="0" bIns="0">
+            <a:spAutoFit/>
+          </a:bodyPr>
+          <a:lstStyle/>
+          <a:p>
+            <a:pPr algn="l">
+              <a:lnSpc>
+                <a:spcPct val="130000"/>
+              </a:lnSpc>
+            </a:pPr>
+            <a:r>
+              <a:rPr sz="1300" b="0">
+                <a:solidFill>
+                  <a:srgbClr val="9CA3AF"/>
+                </a:solidFill>
+                <a:latin typeface="Segoe UI"/>
+              </a:rPr>
+              <a:t>Se puede buscar por viaje, chofer o patente</a:t>
+            </a:r>
+          </a:p>
+        </p:txBody>
+      </p:sp>
+      <p:sp>
+        <p:nvSpPr>
+          <p:cNvPr id="14" name="Oval 13"/>
+          <p:cNvSpPr/>
+          <p:nvPr/>
+        </p:nvSpPr>
+        <p:spPr>
+          <a:xfrm>
+            <a:off x="8732520" y="4507992"/>
+            <a:ext cx="109728" cy="109728"/>
+          </a:xfrm>
+          <a:prstGeom prst="ellipse">
+            <a:avLst/>
+          </a:prstGeom>
+          <a:solidFill>
+            <a:srgbClr val="34D399"/>
+          </a:solidFill>
+          <a:ln>
+            <a:noFill/>
+          </a:ln>
+          <a:effectLst/>
+        </p:spPr>
+        <p:style>
+          <a:lnRef idx="1">
+            <a:schemeClr val="accent1"/>
+          </a:lnRef>
+          <a:fillRef idx="3">
+            <a:schemeClr val="accent1"/>
+          </a:fillRef>
+          <a:effectRef idx="2">
+            <a:schemeClr val="accent1"/>
+          </a:effectRef>
+          <a:fontRef idx="minor">
+            <a:schemeClr val="lt1"/>
+          </a:fontRef>
+        </p:style>
+        <p:txBody>
+          <a:bodyPr rtlCol="0" anchor="ctr"/>
+          <a:lstStyle/>
+          <a:p>
+            <a:pPr algn="ctr"/>
+          </a:p>
+        </p:txBody>
+      </p:sp>
+      <p:sp>
+        <p:nvSpPr>
+          <p:cNvPr id="15" name="TextBox 14"/>
+          <p:cNvSpPr txBox="1"/>
+          <p:nvPr/>
+        </p:nvSpPr>
+        <p:spPr>
+          <a:xfrm>
+            <a:off x="9034272" y="4398264"/>
+            <a:ext cx="2514600" cy="822960"/>
+          </a:xfrm>
+          <a:prstGeom prst="rect">
+            <a:avLst/>
+          </a:prstGeom>
+          <a:noFill/>
+        </p:spPr>
+        <p:txBody>
+          <a:bodyPr wrap="square" anchor="t" lIns="0" rIns="0" tIns="0" bIns="0">
+            <a:spAutoFit/>
+          </a:bodyPr>
+          <a:lstStyle/>
+          <a:p>
+            <a:pPr algn="l">
+              <a:lnSpc>
+                <a:spcPct val="130000"/>
+              </a:lnSpc>
+            </a:pPr>
+            <a:r>
+              <a:rPr sz="1300" b="0">
+                <a:solidFill>
+                  <a:srgbClr val="9CA3AF"/>
+                </a:solidFill>
+                <a:latin typeface="Segoe UI"/>
+              </a:rPr>
+              <a:t>Cada viaje muestra su total por moneda</a:t>
+            </a:r>
+          </a:p>
+        </p:txBody>
+      </p:sp>
+      <p:sp>
+        <p:nvSpPr>
+          <p:cNvPr id="16" name="Rounded Rectangle 15"/>
+          <p:cNvSpPr/>
+          <p:nvPr/>
+        </p:nvSpPr>
+        <p:spPr>
+          <a:xfrm>
+            <a:off x="8686800" y="5532120"/>
+            <a:ext cx="2880360" cy="868680"/>
+          </a:xfrm>
+          <a:prstGeom prst="roundRect">
+            <a:avLst>
+              <a:gd name="adj" fmla="val 6000"/>
+            </a:avLst>
+          </a:prstGeom>
+          <a:solidFill>
+            <a:srgbClr val="161A22"/>
+          </a:solidFill>
+          <a:ln w="12700">
+            <a:solidFill>
+              <a:srgbClr val="60A5FA"/>
+            </a:solidFill>
+          </a:ln>
+          <a:effectLst/>
+        </p:spPr>
+        <p:style>
+          <a:lnRef idx="1">
+            <a:schemeClr val="accent1"/>
+          </a:lnRef>
+          <a:fillRef idx="3">
+            <a:schemeClr val="accent1"/>
+          </a:fillRef>
+          <a:effectRef idx="2">
+            <a:schemeClr val="accent1"/>
+          </a:effectRef>
+          <a:fontRef idx="minor">
+            <a:schemeClr val="lt1"/>
+          </a:fontRef>
+        </p:style>
+        <p:txBody>
+          <a:bodyPr rtlCol="0" anchor="ctr"/>
+          <a:lstStyle/>
+          <a:p/>
+        </p:txBody>
+      </p:sp>
+      <p:sp>
+        <p:nvSpPr>
+          <p:cNvPr id="17" name="TextBox 16"/>
+          <p:cNvSpPr txBox="1"/>
+          <p:nvPr/>
+        </p:nvSpPr>
+        <p:spPr>
+          <a:xfrm>
+            <a:off x="8915400" y="5705856"/>
+            <a:ext cx="2468880" cy="548640"/>
+          </a:xfrm>
+          <a:prstGeom prst="rect">
+            <a:avLst/>
+          </a:prstGeom>
+          <a:noFill/>
+        </p:spPr>
+        <p:txBody>
+          <a:bodyPr wrap="square" anchor="t" lIns="0" rIns="0" tIns="0" bIns="0">
+            <a:spAutoFit/>
+          </a:bodyPr>
+          <a:lstStyle/>
+          <a:p>
+            <a:pPr algn="l">
+              <a:lnSpc>
+                <a:spcPct val="125000"/>
+              </a:lnSpc>
+            </a:pPr>
+            <a:r>
+              <a:rPr sz="1100" b="1">
+                <a:solidFill>
+                  <a:srgbClr val="60A5FA"/>
+                </a:solidFill>
+                <a:latin typeface="Segoe UI"/>
+              </a:rPr>
+              <a:t>Los importes de cada moneda van por separado, nunca sumados.</a:t>
+            </a:r>
+          </a:p>
+        </p:txBody>
+      </p:sp>
+    </p:spTree>
+  </p:cSld>
+  <p:clrMapOvr>
+    <a:masterClrMapping/>
+  </p:clrMapOvr>
+</p:sld>
+</file>
+
+<file path=ppt/slides/slide12.xml><?xml version="1.0" encoding="utf-8"?>
+<p:sld xmlns:a="http://schemas.openxmlformats.org/drawingml/2006/main" xmlns:p="http://schemas.openxmlformats.org/presentationml/2006/main" xmlns:r="http://schemas.openxmlformats.org/officeDocument/2006/relationships">
+  <p:cSld>
+    <p:spTree>
+      <p:nvGrpSpPr>
+        <p:cNvPr id="1" name=""/>
+        <p:cNvGrpSpPr/>
+        <p:nvPr/>
+      </p:nvGrpSpPr>
+      <p:grpSpPr/>
+      <p:sp>
+        <p:nvSpPr>
+          <p:cNvPr id="2" name="Rectangle 1"/>
+          <p:cNvSpPr/>
+          <p:nvPr/>
+        </p:nvSpPr>
+        <p:spPr>
+          <a:xfrm>
+            <a:off x="0" y="0"/>
+            <a:ext cx="12191695" cy="6858000"/>
+          </a:xfrm>
+          <a:prstGeom prst="rect">
+            <a:avLst/>
+          </a:prstGeom>
+          <a:solidFill>
+            <a:srgbClr val="0F1117"/>
+          </a:solidFill>
+          <a:ln>
+            <a:noFill/>
+          </a:ln>
+          <a:effectLst/>
+        </p:spPr>
+        <p:style>
+          <a:lnRef idx="1">
+            <a:schemeClr val="accent1"/>
+          </a:lnRef>
+          <a:fillRef idx="3">
+            <a:schemeClr val="accent1"/>
+          </a:fillRef>
+          <a:effectRef idx="2">
+            <a:schemeClr val="accent1"/>
+          </a:effectRef>
+          <a:fontRef idx="minor">
+            <a:schemeClr val="lt1"/>
+          </a:fontRef>
+        </p:style>
+        <p:txBody>
+          <a:bodyPr rtlCol="0" anchor="ctr"/>
+          <a:lstStyle/>
+          <a:p>
+            <a:pPr algn="ctr"/>
+          </a:p>
+        </p:txBody>
+      </p:sp>
+      <p:sp>
+        <p:nvSpPr>
+          <p:cNvPr id="3" name="TextBox 2"/>
+          <p:cNvSpPr txBox="1"/>
+          <p:nvPr/>
+        </p:nvSpPr>
+        <p:spPr>
+          <a:xfrm>
+            <a:off x="777240" y="457200"/>
+            <a:ext cx="5486400" cy="329184"/>
+          </a:xfrm>
+          <a:prstGeom prst="rect">
+            <a:avLst/>
+          </a:prstGeom>
+          <a:noFill/>
+        </p:spPr>
+        <p:txBody>
+          <a:bodyPr wrap="square" anchor="t" lIns="0" rIns="0" tIns="0" bIns="0">
+            <a:spAutoFit/>
+          </a:bodyPr>
+          <a:lstStyle/>
+          <a:p>
+            <a:pPr algn="l">
+              <a:lnSpc>
+                <a:spcPct val="115000"/>
+              </a:lnSpc>
+            </a:pPr>
+            <a:r>
+              <a:rPr sz="1300" b="1">
+                <a:solidFill>
+                  <a:srgbClr val="34D399"/>
+                </a:solidFill>
+                <a:latin typeface="Segoe UI"/>
+              </a:rPr>
+              <a:t>PASO 8</a:t>
+            </a:r>
+          </a:p>
+        </p:txBody>
+      </p:sp>
+      <p:sp>
+        <p:nvSpPr>
+          <p:cNvPr id="4" name="TextBox 3"/>
+          <p:cNvSpPr txBox="1"/>
+          <p:nvPr/>
+        </p:nvSpPr>
+        <p:spPr>
+          <a:xfrm>
+            <a:off x="777240" y="804672"/>
+            <a:ext cx="7315200" cy="640080"/>
+          </a:xfrm>
+          <a:prstGeom prst="rect">
+            <a:avLst/>
+          </a:prstGeom>
+          <a:noFill/>
+        </p:spPr>
+        <p:txBody>
+          <a:bodyPr wrap="square" anchor="t" lIns="0" rIns="0" tIns="0" bIns="0">
+            <a:spAutoFit/>
+          </a:bodyPr>
+          <a:lstStyle/>
+          <a:p>
+            <a:pPr algn="l">
+              <a:lnSpc>
+                <a:spcPct val="115000"/>
+              </a:lnSpc>
+            </a:pPr>
+            <a:r>
+              <a:rPr sz="3300" b="1">
+                <a:solidFill>
+                  <a:srgbClr val="FFFFFF"/>
+                </a:solidFill>
+                <a:latin typeface="Segoe UI"/>
+              </a:rPr>
+              <a:t>El detalle del viaje</a:t>
+            </a:r>
+          </a:p>
+        </p:txBody>
+      </p:sp>
+      <p:sp>
+        <p:nvSpPr>
+          <p:cNvPr id="5" name="TextBox 4"/>
+          <p:cNvSpPr txBox="1"/>
+          <p:nvPr/>
+        </p:nvSpPr>
+        <p:spPr>
+          <a:xfrm>
+            <a:off x="777240" y="1481328"/>
+            <a:ext cx="7863840" cy="411480"/>
+          </a:xfrm>
+          <a:prstGeom prst="rect">
+            <a:avLst/>
+          </a:prstGeom>
+          <a:noFill/>
+        </p:spPr>
+        <p:txBody>
+          <a:bodyPr wrap="square" anchor="t" lIns="0" rIns="0" tIns="0" bIns="0">
+            <a:spAutoFit/>
+          </a:bodyPr>
+          <a:lstStyle/>
+          <a:p>
+            <a:pPr algn="l">
+              <a:lnSpc>
+                <a:spcPct val="115000"/>
+              </a:lnSpc>
+            </a:pPr>
+            <a:r>
+              <a:rPr sz="1600" b="0">
+                <a:solidFill>
+                  <a:srgbClr val="9CA3AF"/>
+                </a:solidFill>
+                <a:latin typeface="Segoe UI"/>
+              </a:rPr>
+              <a:t>Los 27 campos que Softland necesita, uno por columna.</a:t>
+            </a:r>
+          </a:p>
+        </p:txBody>
+      </p:sp>
+      <p:sp>
+        <p:nvSpPr>
+          <p:cNvPr id="6" name="Rounded Rectangle 5"/>
+          <p:cNvSpPr/>
+          <p:nvPr/>
+        </p:nvSpPr>
+        <p:spPr>
+          <a:xfrm>
+            <a:off x="731520" y="1993392"/>
+            <a:ext cx="7772400" cy="3712464"/>
+          </a:xfrm>
+          <a:prstGeom prst="roundRect">
+            <a:avLst>
+              <a:gd name="adj" fmla="val 6000"/>
+            </a:avLst>
+          </a:prstGeom>
+          <a:solidFill>
+            <a:srgbClr val="0A0C10"/>
+          </a:solidFill>
+          <a:ln w="12700">
+            <a:solidFill>
+              <a:srgbClr val="2E3442"/>
+            </a:solidFill>
+          </a:ln>
+          <a:effectLst/>
+        </p:spPr>
+        <p:style>
+          <a:lnRef idx="1">
+            <a:schemeClr val="accent1"/>
+          </a:lnRef>
+          <a:fillRef idx="3">
+            <a:schemeClr val="accent1"/>
+          </a:fillRef>
+          <a:effectRef idx="2">
+            <a:schemeClr val="accent1"/>
+          </a:effectRef>
+          <a:fontRef idx="minor">
+            <a:schemeClr val="lt1"/>
+          </a:fontRef>
+        </p:style>
+        <p:txBody>
+          <a:bodyPr rtlCol="0" anchor="ctr"/>
+          <a:lstStyle/>
+          <a:p/>
+        </p:txBody>
+      </p:sp>
+      <p:pic>
+        <p:nvPicPr>
+          <p:cNvPr id="7" name="Picture 6" descr="08_admin_tabla.png"/>
+          <p:cNvPicPr>
+            <a:picLocks noChangeAspect="1"/>
+          </p:cNvPicPr>
+          <p:nvPr/>
+        </p:nvPicPr>
+        <p:blipFill>
+          <a:blip r:embed="rId2"/>
+          <a:stretch>
+            <a:fillRect/>
+          </a:stretch>
+        </p:blipFill>
+        <p:spPr>
+          <a:xfrm>
+            <a:off x="777240" y="2039112"/>
+            <a:ext cx="7680960" cy="3621024"/>
+          </a:xfrm>
+          <a:prstGeom prst="rect">
+            <a:avLst/>
+          </a:prstGeom>
+        </p:spPr>
+      </p:pic>
+      <p:sp>
+        <p:nvSpPr>
+          <p:cNvPr id="8" name="Oval 7"/>
+          <p:cNvSpPr/>
+          <p:nvPr/>
+        </p:nvSpPr>
+        <p:spPr>
+          <a:xfrm>
+            <a:off x="8732520" y="2258568"/>
+            <a:ext cx="109728" cy="109728"/>
+          </a:xfrm>
+          <a:prstGeom prst="ellipse">
+            <a:avLst/>
+          </a:prstGeom>
+          <a:solidFill>
+            <a:srgbClr val="34D399"/>
+          </a:solidFill>
+          <a:ln>
+            <a:noFill/>
+          </a:ln>
+          <a:effectLst/>
+        </p:spPr>
+        <p:style>
+          <a:lnRef idx="1">
+            <a:schemeClr val="accent1"/>
+          </a:lnRef>
+          <a:fillRef idx="3">
+            <a:schemeClr val="accent1"/>
+          </a:fillRef>
+          <a:effectRef idx="2">
+            <a:schemeClr val="accent1"/>
+          </a:effectRef>
+          <a:fontRef idx="minor">
+            <a:schemeClr val="lt1"/>
+          </a:fontRef>
+        </p:style>
+        <p:txBody>
+          <a:bodyPr rtlCol="0" anchor="ctr"/>
+          <a:lstStyle/>
+          <a:p>
+            <a:pPr algn="ctr"/>
+          </a:p>
+        </p:txBody>
+      </p:sp>
+      <p:sp>
+        <p:nvSpPr>
+          <p:cNvPr id="9" name="TextBox 8"/>
+          <p:cNvSpPr txBox="1"/>
+          <p:nvPr/>
+        </p:nvSpPr>
+        <p:spPr>
+          <a:xfrm>
+            <a:off x="9034272" y="2148840"/>
+            <a:ext cx="2514600" cy="822960"/>
+          </a:xfrm>
+          <a:prstGeom prst="rect">
+            <a:avLst/>
+          </a:prstGeom>
+          <a:noFill/>
+        </p:spPr>
+        <p:txBody>
+          <a:bodyPr wrap="square" anchor="t" lIns="0" rIns="0" tIns="0" bIns="0">
+            <a:spAutoFit/>
+          </a:bodyPr>
+          <a:lstStyle/>
+          <a:p>
+            <a:pPr algn="l">
+              <a:lnSpc>
+                <a:spcPct val="130000"/>
+              </a:lnSpc>
+            </a:pPr>
+            <a:r>
+              <a:rPr sz="1300" b="0">
+                <a:solidFill>
+                  <a:srgbClr val="9CA3AF"/>
+                </a:solidFill>
+                <a:latin typeface="Segoe UI"/>
+              </a:rPr>
+              <a:t>Cada fila es un gasto, con la foto del ticket</a:t>
+            </a:r>
+          </a:p>
+        </p:txBody>
+      </p:sp>
+      <p:sp>
+        <p:nvSpPr>
+          <p:cNvPr id="10" name="Oval 9"/>
+          <p:cNvSpPr/>
+          <p:nvPr/>
+        </p:nvSpPr>
+        <p:spPr>
+          <a:xfrm>
+            <a:off x="8732520" y="3008376"/>
+            <a:ext cx="109728" cy="109728"/>
+          </a:xfrm>
+          <a:prstGeom prst="ellipse">
+            <a:avLst/>
+          </a:prstGeom>
+          <a:solidFill>
+            <a:srgbClr val="34D399"/>
+          </a:solidFill>
+          <a:ln>
+            <a:noFill/>
+          </a:ln>
+          <a:effectLst/>
+        </p:spPr>
+        <p:style>
+          <a:lnRef idx="1">
+            <a:schemeClr val="accent1"/>
+          </a:lnRef>
+          <a:fillRef idx="3">
+            <a:schemeClr val="accent1"/>
+          </a:fillRef>
+          <a:effectRef idx="2">
+            <a:schemeClr val="accent1"/>
+          </a:effectRef>
+          <a:fontRef idx="minor">
+            <a:schemeClr val="lt1"/>
+          </a:fontRef>
+        </p:style>
+        <p:txBody>
+          <a:bodyPr rtlCol="0" anchor="ctr"/>
+          <a:lstStyle/>
+          <a:p>
+            <a:pPr algn="ctr"/>
+          </a:p>
+        </p:txBody>
+      </p:sp>
+      <p:sp>
+        <p:nvSpPr>
+          <p:cNvPr id="11" name="TextBox 10"/>
+          <p:cNvSpPr txBox="1"/>
+          <p:nvPr/>
+        </p:nvSpPr>
+        <p:spPr>
+          <a:xfrm>
+            <a:off x="9034272" y="2898648"/>
+            <a:ext cx="2514600" cy="822960"/>
+          </a:xfrm>
+          <a:prstGeom prst="rect">
+            <a:avLst/>
+          </a:prstGeom>
+          <a:noFill/>
+        </p:spPr>
+        <p:txBody>
+          <a:bodyPr wrap="square" anchor="t" lIns="0" rIns="0" tIns="0" bIns="0">
+            <a:spAutoFit/>
+          </a:bodyPr>
+          <a:lstStyle/>
+          <a:p>
+            <a:pPr algn="l">
+              <a:lnSpc>
+                <a:spcPct val="130000"/>
+              </a:lnSpc>
+            </a:pPr>
+            <a:r>
+              <a:rPr sz="1300" b="0">
+                <a:solidFill>
+                  <a:srgbClr val="9CA3AF"/>
+                </a:solidFill>
+                <a:latin typeface="Segoe UI"/>
+              </a:rPr>
+              <a:t>La tabla se desplaza a lo ancho: son 27 columnas</a:t>
+            </a:r>
+          </a:p>
+        </p:txBody>
+      </p:sp>
+      <p:sp>
+        <p:nvSpPr>
+          <p:cNvPr id="12" name="Oval 11"/>
+          <p:cNvSpPr/>
+          <p:nvPr/>
+        </p:nvSpPr>
+        <p:spPr>
+          <a:xfrm>
+            <a:off x="8732520" y="3758184"/>
+            <a:ext cx="109728" cy="109728"/>
+          </a:xfrm>
+          <a:prstGeom prst="ellipse">
+            <a:avLst/>
+          </a:prstGeom>
+          <a:solidFill>
+            <a:srgbClr val="34D399"/>
+          </a:solidFill>
+          <a:ln>
+            <a:noFill/>
+          </a:ln>
+          <a:effectLst/>
+        </p:spPr>
+        <p:style>
+          <a:lnRef idx="1">
+            <a:schemeClr val="accent1"/>
+          </a:lnRef>
+          <a:fillRef idx="3">
+            <a:schemeClr val="accent1"/>
+          </a:fillRef>
+          <a:effectRef idx="2">
+            <a:schemeClr val="accent1"/>
+          </a:effectRef>
+          <a:fontRef idx="minor">
+            <a:schemeClr val="lt1"/>
+          </a:fontRef>
+        </p:style>
+        <p:txBody>
+          <a:bodyPr rtlCol="0" anchor="ctr"/>
+          <a:lstStyle/>
+          <a:p>
+            <a:pPr algn="ctr"/>
+          </a:p>
+        </p:txBody>
+      </p:sp>
+      <p:sp>
+        <p:nvSpPr>
+          <p:cNvPr id="13" name="TextBox 12"/>
+          <p:cNvSpPr txBox="1"/>
+          <p:nvPr/>
+        </p:nvSpPr>
+        <p:spPr>
+          <a:xfrm>
+            <a:off x="9034272" y="3648456"/>
+            <a:ext cx="2514600" cy="822960"/>
+          </a:xfrm>
+          <a:prstGeom prst="rect">
+            <a:avLst/>
+          </a:prstGeom>
+          <a:noFill/>
+        </p:spPr>
+        <p:txBody>
+          <a:bodyPr wrap="square" anchor="t" lIns="0" rIns="0" tIns="0" bIns="0">
+            <a:spAutoFit/>
+          </a:bodyPr>
+          <a:lstStyle/>
+          <a:p>
+            <a:pPr algn="l">
+              <a:lnSpc>
+                <a:spcPct val="130000"/>
+              </a:lnSpc>
+            </a:pPr>
+            <a:r>
+              <a:rPr sz="1300" b="0">
+                <a:solidFill>
+                  <a:srgbClr val="9CA3AF"/>
+                </a:solidFill>
+                <a:latin typeface="Segoe UI"/>
+              </a:rPr>
+              <a:t>Se hace clic en una celda para corregirla</a:t>
+            </a:r>
+          </a:p>
+        </p:txBody>
+      </p:sp>
+      <p:sp>
+        <p:nvSpPr>
+          <p:cNvPr id="14" name="Oval 13"/>
+          <p:cNvSpPr/>
+          <p:nvPr/>
+        </p:nvSpPr>
+        <p:spPr>
+          <a:xfrm>
+            <a:off x="8732520" y="4507992"/>
+            <a:ext cx="109728" cy="109728"/>
+          </a:xfrm>
+          <a:prstGeom prst="ellipse">
+            <a:avLst/>
+          </a:prstGeom>
+          <a:solidFill>
+            <a:srgbClr val="34D399"/>
+          </a:solidFill>
+          <a:ln>
+            <a:noFill/>
+          </a:ln>
+          <a:effectLst/>
+        </p:spPr>
+        <p:style>
+          <a:lnRef idx="1">
+            <a:schemeClr val="accent1"/>
+          </a:lnRef>
+          <a:fillRef idx="3">
+            <a:schemeClr val="accent1"/>
+          </a:fillRef>
+          <a:effectRef idx="2">
+            <a:schemeClr val="accent1"/>
+          </a:effectRef>
+          <a:fontRef idx="minor">
+            <a:schemeClr val="lt1"/>
+          </a:fontRef>
+        </p:style>
+        <p:txBody>
+          <a:bodyPr rtlCol="0" anchor="ctr"/>
+          <a:lstStyle/>
+          <a:p>
+            <a:pPr algn="ctr"/>
+          </a:p>
+        </p:txBody>
+      </p:sp>
+      <p:sp>
+        <p:nvSpPr>
+          <p:cNvPr id="15" name="TextBox 14"/>
+          <p:cNvSpPr txBox="1"/>
+          <p:nvPr/>
+        </p:nvSpPr>
+        <p:spPr>
+          <a:xfrm>
+            <a:off x="9034272" y="4398264"/>
+            <a:ext cx="2514600" cy="822960"/>
+          </a:xfrm>
+          <a:prstGeom prst="rect">
+            <a:avLst/>
+          </a:prstGeom>
+          <a:noFill/>
+        </p:spPr>
+        <p:txBody>
+          <a:bodyPr wrap="square" anchor="t" lIns="0" rIns="0" tIns="0" bIns="0">
+            <a:spAutoFit/>
+          </a:bodyPr>
+          <a:lstStyle/>
+          <a:p>
+            <a:pPr algn="l">
+              <a:lnSpc>
+                <a:spcPct val="130000"/>
+              </a:lnSpc>
+            </a:pPr>
+            <a:r>
+              <a:rPr sz="1300" b="0">
+                <a:solidFill>
+                  <a:srgbClr val="9CA3AF"/>
+                </a:solidFill>
+                <a:latin typeface="Segoe UI"/>
+              </a:rPr>
+              <a:t>El lapiz abre el gasto completo; la papelera lo elimina</a:t>
+            </a:r>
+          </a:p>
+        </p:txBody>
+      </p:sp>
+      <p:sp>
+        <p:nvSpPr>
+          <p:cNvPr id="16" name="Rounded Rectangle 15"/>
+          <p:cNvSpPr/>
+          <p:nvPr/>
+        </p:nvSpPr>
+        <p:spPr>
+          <a:xfrm>
+            <a:off x="8686800" y="5532120"/>
+            <a:ext cx="2880360" cy="868680"/>
+          </a:xfrm>
+          <a:prstGeom prst="roundRect">
+            <a:avLst>
+              <a:gd name="adj" fmla="val 6000"/>
+            </a:avLst>
+          </a:prstGeom>
+          <a:solidFill>
+            <a:srgbClr val="161A22"/>
+          </a:solidFill>
+          <a:ln w="12700">
+            <a:solidFill>
+              <a:srgbClr val="FBBF24"/>
+            </a:solidFill>
+          </a:ln>
+          <a:effectLst/>
+        </p:spPr>
+        <p:style>
+          <a:lnRef idx="1">
+            <a:schemeClr val="accent1"/>
+          </a:lnRef>
+          <a:fillRef idx="3">
+            <a:schemeClr val="accent1"/>
+          </a:fillRef>
+          <a:effectRef idx="2">
+            <a:schemeClr val="accent1"/>
+          </a:effectRef>
+          <a:fontRef idx="minor">
+            <a:schemeClr val="lt1"/>
+          </a:fontRef>
+        </p:style>
+        <p:txBody>
+          <a:bodyPr rtlCol="0" anchor="ctr"/>
+          <a:lstStyle/>
+          <a:p/>
+        </p:txBody>
+      </p:sp>
+      <p:sp>
+        <p:nvSpPr>
+          <p:cNvPr id="17" name="TextBox 16"/>
+          <p:cNvSpPr txBox="1"/>
+          <p:nvPr/>
+        </p:nvSpPr>
+        <p:spPr>
+          <a:xfrm>
+            <a:off x="8915400" y="5705856"/>
+            <a:ext cx="2468880" cy="548640"/>
+          </a:xfrm>
+          <a:prstGeom prst="rect">
+            <a:avLst/>
+          </a:prstGeom>
+          <a:noFill/>
+        </p:spPr>
+        <p:txBody>
+          <a:bodyPr wrap="square" anchor="t" lIns="0" rIns="0" tIns="0" bIns="0">
+            <a:spAutoFit/>
+          </a:bodyPr>
+          <a:lstStyle/>
+          <a:p>
+            <a:pPr algn="l">
+              <a:lnSpc>
+                <a:spcPct val="125000"/>
+              </a:lnSpc>
+            </a:pPr>
+            <a:r>
+              <a:rPr sz="1100" b="1">
+                <a:solidFill>
+                  <a:srgbClr val="FBBF24"/>
+                </a:solidFill>
+                <a:latin typeface="Segoe UI"/>
+              </a:rPr>
+              <a:t>El borrado esta solo aca. Es definitivo: se va tambien la foto.</a:t>
+            </a:r>
+          </a:p>
+        </p:txBody>
+      </p:sp>
+    </p:spTree>
+  </p:cSld>
+  <p:clrMapOvr>
+    <a:masterClrMapping/>
+  </p:clrMapOvr>
+</p:sld>
+</file>
+
+<file path=ppt/slides/slide13.xml><?xml version="1.0" encoding="utf-8"?>
+<p:sld xmlns:a="http://schemas.openxmlformats.org/drawingml/2006/main" xmlns:p="http://schemas.openxmlformats.org/presentationml/2006/main" xmlns:r="http://schemas.openxmlformats.org/officeDocument/2006/relationships">
+  <p:cSld>
+    <p:spTree>
+      <p:nvGrpSpPr>
+        <p:cNvPr id="1" name=""/>
+        <p:cNvGrpSpPr/>
+        <p:nvPr/>
+      </p:nvGrpSpPr>
+      <p:grpSpPr/>
+      <p:sp>
+        <p:nvSpPr>
+          <p:cNvPr id="2" name="Rectangle 1"/>
+          <p:cNvSpPr/>
+          <p:nvPr/>
+        </p:nvSpPr>
+        <p:spPr>
+          <a:xfrm>
+            <a:off x="0" y="0"/>
+            <a:ext cx="12191695" cy="6858000"/>
+          </a:xfrm>
+          <a:prstGeom prst="rect">
+            <a:avLst/>
+          </a:prstGeom>
+          <a:solidFill>
+            <a:srgbClr val="0F1117"/>
+          </a:solidFill>
+          <a:ln>
+            <a:noFill/>
+          </a:ln>
+          <a:effectLst/>
+        </p:spPr>
+        <p:style>
+          <a:lnRef idx="1">
+            <a:schemeClr val="accent1"/>
+          </a:lnRef>
+          <a:fillRef idx="3">
+            <a:schemeClr val="accent1"/>
+          </a:fillRef>
+          <a:effectRef idx="2">
+            <a:schemeClr val="accent1"/>
+          </a:effectRef>
+          <a:fontRef idx="minor">
+            <a:schemeClr val="lt1"/>
+          </a:fontRef>
+        </p:style>
+        <p:txBody>
+          <a:bodyPr rtlCol="0" anchor="ctr"/>
+          <a:lstStyle/>
+          <a:p>
+            <a:pPr algn="ctr"/>
+          </a:p>
+        </p:txBody>
+      </p:sp>
+      <p:sp>
+        <p:nvSpPr>
+          <p:cNvPr id="3" name="TextBox 2"/>
+          <p:cNvSpPr txBox="1"/>
+          <p:nvPr/>
+        </p:nvSpPr>
+        <p:spPr>
+          <a:xfrm>
+            <a:off x="777240" y="457200"/>
+            <a:ext cx="5486400" cy="329184"/>
+          </a:xfrm>
+          <a:prstGeom prst="rect">
+            <a:avLst/>
+          </a:prstGeom>
+          <a:noFill/>
+        </p:spPr>
+        <p:txBody>
+          <a:bodyPr wrap="square" anchor="t" lIns="0" rIns="0" tIns="0" bIns="0">
+            <a:spAutoFit/>
+          </a:bodyPr>
+          <a:lstStyle/>
+          <a:p>
+            <a:pPr algn="l">
+              <a:lnSpc>
+                <a:spcPct val="115000"/>
+              </a:lnSpc>
+            </a:pPr>
+            <a:r>
+              <a:rPr sz="1300" b="1">
+                <a:solidFill>
+                  <a:srgbClr val="34D399"/>
+                </a:solidFill>
+                <a:latin typeface="Segoe UI"/>
+              </a:rPr>
+              <a:t>PASO 9</a:t>
+            </a:r>
+          </a:p>
+        </p:txBody>
+      </p:sp>
+      <p:sp>
+        <p:nvSpPr>
+          <p:cNvPr id="4" name="TextBox 3"/>
+          <p:cNvSpPr txBox="1"/>
+          <p:nvPr/>
+        </p:nvSpPr>
+        <p:spPr>
+          <a:xfrm>
+            <a:off x="777240" y="804672"/>
+            <a:ext cx="7315200" cy="640080"/>
+          </a:xfrm>
+          <a:prstGeom prst="rect">
+            <a:avLst/>
+          </a:prstGeom>
+          <a:noFill/>
+        </p:spPr>
+        <p:txBody>
+          <a:bodyPr wrap="square" anchor="t" lIns="0" rIns="0" tIns="0" bIns="0">
+            <a:spAutoFit/>
+          </a:bodyPr>
+          <a:lstStyle/>
+          <a:p>
+            <a:pPr algn="l">
+              <a:lnSpc>
+                <a:spcPct val="115000"/>
+              </a:lnSpc>
+            </a:pPr>
+            <a:r>
+              <a:rPr sz="3300" b="1">
+                <a:solidFill>
+                  <a:srgbClr val="FFFFFF"/>
+                </a:solidFill>
+                <a:latin typeface="Segoe UI"/>
+              </a:rPr>
+              <a:t>Aprobar la rendicion</a:t>
+            </a:r>
+          </a:p>
+        </p:txBody>
+      </p:sp>
+      <p:sp>
+        <p:nvSpPr>
+          <p:cNvPr id="5" name="TextBox 4"/>
+          <p:cNvSpPr txBox="1"/>
+          <p:nvPr/>
+        </p:nvSpPr>
+        <p:spPr>
+          <a:xfrm>
+            <a:off x="777240" y="1481328"/>
+            <a:ext cx="7863840" cy="411480"/>
+          </a:xfrm>
+          <a:prstGeom prst="rect">
+            <a:avLst/>
+          </a:prstGeom>
+          <a:noFill/>
+        </p:spPr>
+        <p:txBody>
+          <a:bodyPr wrap="square" anchor="t" lIns="0" rIns="0" tIns="0" bIns="0">
+            <a:spAutoFit/>
+          </a:bodyPr>
+          <a:lstStyle/>
+          <a:p>
+            <a:pPr algn="l">
+              <a:lnSpc>
+                <a:spcPct val="115000"/>
+              </a:lnSpc>
+            </a:pPr>
+            <a:r>
+              <a:rPr sz="1600" b="0">
+                <a:solidFill>
+                  <a:srgbClr val="9CA3AF"/>
+                </a:solidFill>
+                <a:latin typeface="Segoe UI"/>
+              </a:rPr>
+              <a:t>Cuando los datos ya estan controlados.</a:t>
+            </a:r>
+          </a:p>
+        </p:txBody>
+      </p:sp>
+      <p:sp>
+        <p:nvSpPr>
+          <p:cNvPr id="6" name="Rounded Rectangle 5"/>
+          <p:cNvSpPr/>
+          <p:nvPr/>
+        </p:nvSpPr>
+        <p:spPr>
+          <a:xfrm>
+            <a:off x="731520" y="1993392"/>
+            <a:ext cx="7772400" cy="3712464"/>
+          </a:xfrm>
+          <a:prstGeom prst="roundRect">
+            <a:avLst>
+              <a:gd name="adj" fmla="val 6000"/>
+            </a:avLst>
+          </a:prstGeom>
+          <a:solidFill>
+            <a:srgbClr val="0A0C10"/>
+          </a:solidFill>
+          <a:ln w="12700">
+            <a:solidFill>
+              <a:srgbClr val="2E3442"/>
+            </a:solidFill>
+          </a:ln>
+          <a:effectLst/>
+        </p:spPr>
+        <p:style>
+          <a:lnRef idx="1">
+            <a:schemeClr val="accent1"/>
+          </a:lnRef>
+          <a:fillRef idx="3">
+            <a:schemeClr val="accent1"/>
+          </a:fillRef>
+          <a:effectRef idx="2">
+            <a:schemeClr val="accent1"/>
+          </a:effectRef>
+          <a:fontRef idx="minor">
+            <a:schemeClr val="lt1"/>
+          </a:fontRef>
+        </p:style>
+        <p:txBody>
+          <a:bodyPr rtlCol="0" anchor="ctr"/>
+          <a:lstStyle/>
+          <a:p/>
+        </p:txBody>
+      </p:sp>
+      <p:pic>
+        <p:nvPicPr>
+          <p:cNvPr id="7" name="Picture 6" descr="08_admin_tabla.png"/>
+          <p:cNvPicPr>
+            <a:picLocks noChangeAspect="1"/>
+          </p:cNvPicPr>
+          <p:nvPr/>
+        </p:nvPicPr>
+        <p:blipFill>
+          <a:blip r:embed="rId2"/>
+          <a:stretch>
+            <a:fillRect/>
+          </a:stretch>
+        </p:blipFill>
+        <p:spPr>
+          <a:xfrm>
+            <a:off x="777240" y="2039112"/>
+            <a:ext cx="7680960" cy="3621024"/>
+          </a:xfrm>
+          <a:prstGeom prst="rect">
+            <a:avLst/>
+          </a:prstGeom>
+        </p:spPr>
+      </p:pic>
+      <p:sp>
+        <p:nvSpPr>
+          <p:cNvPr id="8" name="Oval 7"/>
+          <p:cNvSpPr/>
+          <p:nvPr/>
+        </p:nvSpPr>
+        <p:spPr>
+          <a:xfrm>
+            <a:off x="8732520" y="2258568"/>
+            <a:ext cx="109728" cy="109728"/>
+          </a:xfrm>
+          <a:prstGeom prst="ellipse">
+            <a:avLst/>
+          </a:prstGeom>
+          <a:solidFill>
+            <a:srgbClr val="34D399"/>
+          </a:solidFill>
+          <a:ln>
+            <a:noFill/>
+          </a:ln>
+          <a:effectLst/>
+        </p:spPr>
+        <p:style>
+          <a:lnRef idx="1">
+            <a:schemeClr val="accent1"/>
+          </a:lnRef>
+          <a:fillRef idx="3">
+            <a:schemeClr val="accent1"/>
+          </a:fillRef>
+          <a:effectRef idx="2">
+            <a:schemeClr val="accent1"/>
+          </a:effectRef>
+          <a:fontRef idx="minor">
+            <a:schemeClr val="lt1"/>
+          </a:fontRef>
+        </p:style>
+        <p:txBody>
+          <a:bodyPr rtlCol="0" anchor="ctr"/>
+          <a:lstStyle/>
+          <a:p>
+            <a:pPr algn="ctr"/>
+          </a:p>
+        </p:txBody>
+      </p:sp>
+      <p:sp>
+        <p:nvSpPr>
+          <p:cNvPr id="9" name="TextBox 8"/>
+          <p:cNvSpPr txBox="1"/>
+          <p:nvPr/>
+        </p:nvSpPr>
+        <p:spPr>
+          <a:xfrm>
+            <a:off x="9034272" y="2148840"/>
+            <a:ext cx="2514600" cy="822960"/>
+          </a:xfrm>
+          <a:prstGeom prst="rect">
+            <a:avLst/>
+          </a:prstGeom>
+          <a:noFill/>
+        </p:spPr>
+        <p:txBody>
+          <a:bodyPr wrap="square" anchor="t" lIns="0" rIns="0" tIns="0" bIns="0">
+            <a:spAutoFit/>
+          </a:bodyPr>
+          <a:lstStyle/>
+          <a:p>
+            <a:pPr algn="l">
+              <a:lnSpc>
+                <a:spcPct val="130000"/>
+              </a:lnSpc>
+            </a:pPr>
+            <a:r>
+              <a:rPr sz="1300" b="0">
+                <a:solidFill>
+                  <a:srgbClr val="9CA3AF"/>
+                </a:solidFill>
+                <a:latin typeface="Segoe UI"/>
+              </a:rPr>
+              <a:t>Antes de aprobar, revisa importes y fechas</a:t>
+            </a:r>
+          </a:p>
+        </p:txBody>
+      </p:sp>
+      <p:sp>
+        <p:nvSpPr>
+          <p:cNvPr id="10" name="Oval 9"/>
+          <p:cNvSpPr/>
+          <p:nvPr/>
+        </p:nvSpPr>
+        <p:spPr>
+          <a:xfrm>
+            <a:off x="8732520" y="3008376"/>
+            <a:ext cx="109728" cy="109728"/>
+          </a:xfrm>
+          <a:prstGeom prst="ellipse">
+            <a:avLst/>
+          </a:prstGeom>
+          <a:solidFill>
+            <a:srgbClr val="34D399"/>
+          </a:solidFill>
+          <a:ln>
+            <a:noFill/>
+          </a:ln>
+          <a:effectLst/>
+        </p:spPr>
+        <p:style>
+          <a:lnRef idx="1">
+            <a:schemeClr val="accent1"/>
+          </a:lnRef>
+          <a:fillRef idx="3">
+            <a:schemeClr val="accent1"/>
+          </a:fillRef>
+          <a:effectRef idx="2">
+            <a:schemeClr val="accent1"/>
+          </a:effectRef>
+          <a:fontRef idx="minor">
+            <a:schemeClr val="lt1"/>
+          </a:fontRef>
+        </p:style>
+        <p:txBody>
+          <a:bodyPr rtlCol="0" anchor="ctr"/>
+          <a:lstStyle/>
+          <a:p>
+            <a:pPr algn="ctr"/>
+          </a:p>
+        </p:txBody>
+      </p:sp>
+      <p:sp>
+        <p:nvSpPr>
+          <p:cNvPr id="11" name="TextBox 10"/>
+          <p:cNvSpPr txBox="1"/>
+          <p:nvPr/>
+        </p:nvSpPr>
+        <p:spPr>
+          <a:xfrm>
+            <a:off x="9034272" y="2898648"/>
+            <a:ext cx="2514600" cy="822960"/>
+          </a:xfrm>
+          <a:prstGeom prst="rect">
+            <a:avLst/>
+          </a:prstGeom>
+          <a:noFill/>
+        </p:spPr>
+        <p:txBody>
+          <a:bodyPr wrap="square" anchor="t" lIns="0" rIns="0" tIns="0" bIns="0">
+            <a:spAutoFit/>
+          </a:bodyPr>
+          <a:lstStyle/>
+          <a:p>
+            <a:pPr algn="l">
+              <a:lnSpc>
+                <a:spcPct val="130000"/>
+              </a:lnSpc>
+            </a:pPr>
+            <a:r>
+              <a:rPr sz="1300" b="0">
+                <a:solidFill>
+                  <a:srgbClr val="9CA3AF"/>
+                </a:solidFill>
+                <a:latin typeface="Segoe UI"/>
+              </a:rPr>
+              <a:t>Al aprobar queda registrado quien y cuando</a:t>
+            </a:r>
+          </a:p>
+        </p:txBody>
+      </p:sp>
+      <p:sp>
+        <p:nvSpPr>
+          <p:cNvPr id="12" name="Oval 11"/>
+          <p:cNvSpPr/>
+          <p:nvPr/>
+        </p:nvSpPr>
+        <p:spPr>
+          <a:xfrm>
+            <a:off x="8732520" y="3758184"/>
+            <a:ext cx="109728" cy="109728"/>
+          </a:xfrm>
+          <a:prstGeom prst="ellipse">
+            <a:avLst/>
+          </a:prstGeom>
+          <a:solidFill>
+            <a:srgbClr val="34D399"/>
+          </a:solidFill>
+          <a:ln>
+            <a:noFill/>
+          </a:ln>
+          <a:effectLst/>
+        </p:spPr>
+        <p:style>
+          <a:lnRef idx="1">
+            <a:schemeClr val="accent1"/>
+          </a:lnRef>
+          <a:fillRef idx="3">
+            <a:schemeClr val="accent1"/>
+          </a:fillRef>
+          <a:effectRef idx="2">
+            <a:schemeClr val="accent1"/>
+          </a:effectRef>
+          <a:fontRef idx="minor">
+            <a:schemeClr val="lt1"/>
+          </a:fontRef>
+        </p:style>
+        <p:txBody>
+          <a:bodyPr rtlCol="0" anchor="ctr"/>
+          <a:lstStyle/>
+          <a:p>
+            <a:pPr algn="ctr"/>
+          </a:p>
+        </p:txBody>
+      </p:sp>
+      <p:sp>
+        <p:nvSpPr>
+          <p:cNvPr id="13" name="TextBox 12"/>
+          <p:cNvSpPr txBox="1"/>
+          <p:nvPr/>
+        </p:nvSpPr>
+        <p:spPr>
+          <a:xfrm>
+            <a:off x="9034272" y="3648456"/>
+            <a:ext cx="2514600" cy="822960"/>
+          </a:xfrm>
+          <a:prstGeom prst="rect">
+            <a:avLst/>
+          </a:prstGeom>
+          <a:noFill/>
+        </p:spPr>
+        <p:txBody>
+          <a:bodyPr wrap="square" anchor="t" lIns="0" rIns="0" tIns="0" bIns="0">
+            <a:spAutoFit/>
+          </a:bodyPr>
+          <a:lstStyle/>
+          <a:p>
+            <a:pPr algn="l">
+              <a:lnSpc>
+                <a:spcPct val="130000"/>
+              </a:lnSpc>
+            </a:pPr>
+            <a:r>
+              <a:rPr sz="1300" b="0">
+                <a:solidFill>
+                  <a:srgbClr val="9CA3AF"/>
+                </a:solidFill>
+                <a:latin typeface="Segoe UI"/>
+              </a:rPr>
+              <a:t>La rendicion pasa de amarilla a verde en la lista</a:t>
+            </a:r>
+          </a:p>
+        </p:txBody>
+      </p:sp>
+      <p:sp>
+        <p:nvSpPr>
+          <p:cNvPr id="14" name="Oval 13"/>
+          <p:cNvSpPr/>
+          <p:nvPr/>
+        </p:nvSpPr>
+        <p:spPr>
+          <a:xfrm>
+            <a:off x="8732520" y="4507992"/>
+            <a:ext cx="109728" cy="109728"/>
+          </a:xfrm>
+          <a:prstGeom prst="ellipse">
+            <a:avLst/>
+          </a:prstGeom>
+          <a:solidFill>
+            <a:srgbClr val="34D399"/>
+          </a:solidFill>
+          <a:ln>
+            <a:noFill/>
+          </a:ln>
+          <a:effectLst/>
+        </p:spPr>
+        <p:style>
+          <a:lnRef idx="1">
+            <a:schemeClr val="accent1"/>
+          </a:lnRef>
+          <a:fillRef idx="3">
+            <a:schemeClr val="accent1"/>
+          </a:fillRef>
+          <a:effectRef idx="2">
+            <a:schemeClr val="accent1"/>
+          </a:effectRef>
+          <a:fontRef idx="minor">
+            <a:schemeClr val="lt1"/>
+          </a:fontRef>
+        </p:style>
+        <p:txBody>
+          <a:bodyPr rtlCol="0" anchor="ctr"/>
+          <a:lstStyle/>
+          <a:p>
+            <a:pPr algn="ctr"/>
+          </a:p>
+        </p:txBody>
+      </p:sp>
+      <p:sp>
+        <p:nvSpPr>
+          <p:cNvPr id="15" name="TextBox 14"/>
+          <p:cNvSpPr txBox="1"/>
+          <p:nvPr/>
+        </p:nvSpPr>
+        <p:spPr>
+          <a:xfrm>
+            <a:off x="9034272" y="4398264"/>
+            <a:ext cx="2514600" cy="822960"/>
+          </a:xfrm>
+          <a:prstGeom prst="rect">
+            <a:avLst/>
+          </a:prstGeom>
+          <a:noFill/>
+        </p:spPr>
+        <p:txBody>
+          <a:bodyPr wrap="square" anchor="t" lIns="0" rIns="0" tIns="0" bIns="0">
+            <a:spAutoFit/>
+          </a:bodyPr>
+          <a:lstStyle/>
+          <a:p>
+            <a:pPr algn="l">
+              <a:lnSpc>
+                <a:spcPct val="130000"/>
+              </a:lnSpc>
+            </a:pPr>
+            <a:r>
+              <a:rPr sz="1300" b="0">
+                <a:solidFill>
+                  <a:srgbClr val="9CA3AF"/>
+                </a:solidFill>
+                <a:latin typeface="Segoe UI"/>
+              </a:rPr>
+              <a:t>Se puede revocar si despues hay que corregir algo</a:t>
+            </a:r>
+          </a:p>
+        </p:txBody>
+      </p:sp>
+      <p:sp>
+        <p:nvSpPr>
+          <p:cNvPr id="16" name="Rounded Rectangle 15"/>
+          <p:cNvSpPr/>
+          <p:nvPr/>
+        </p:nvSpPr>
+        <p:spPr>
+          <a:xfrm>
+            <a:off x="8686800" y="5532120"/>
+            <a:ext cx="2880360" cy="868680"/>
+          </a:xfrm>
+          <a:prstGeom prst="roundRect">
+            <a:avLst>
+              <a:gd name="adj" fmla="val 6000"/>
+            </a:avLst>
+          </a:prstGeom>
+          <a:solidFill>
+            <a:srgbClr val="161A22"/>
+          </a:solidFill>
+          <a:ln w="12700">
+            <a:solidFill>
+              <a:srgbClr val="FBBF24"/>
+            </a:solidFill>
+          </a:ln>
+          <a:effectLst/>
+        </p:spPr>
+        <p:style>
+          <a:lnRef idx="1">
+            <a:schemeClr val="accent1"/>
+          </a:lnRef>
+          <a:fillRef idx="3">
+            <a:schemeClr val="accent1"/>
+          </a:fillRef>
+          <a:effectRef idx="2">
+            <a:schemeClr val="accent1"/>
+          </a:effectRef>
+          <a:fontRef idx="minor">
+            <a:schemeClr val="lt1"/>
+          </a:fontRef>
+        </p:style>
+        <p:txBody>
+          <a:bodyPr rtlCol="0" anchor="ctr"/>
+          <a:lstStyle/>
+          <a:p/>
+        </p:txBody>
+      </p:sp>
+      <p:sp>
+        <p:nvSpPr>
+          <p:cNvPr id="17" name="TextBox 16"/>
+          <p:cNvSpPr txBox="1"/>
+          <p:nvPr/>
+        </p:nvSpPr>
+        <p:spPr>
+          <a:xfrm>
+            <a:off x="8915400" y="5705856"/>
+            <a:ext cx="2468880" cy="548640"/>
+          </a:xfrm>
+          <a:prstGeom prst="rect">
+            <a:avLst/>
+          </a:prstGeom>
+          <a:noFill/>
+        </p:spPr>
+        <p:txBody>
+          <a:bodyPr wrap="square" anchor="t" lIns="0" rIns="0" tIns="0" bIns="0">
+            <a:spAutoFit/>
+          </a:bodyPr>
+          <a:lstStyle/>
+          <a:p>
+            <a:pPr algn="l">
+              <a:lnSpc>
+                <a:spcPct val="125000"/>
+              </a:lnSpc>
+            </a:pPr>
+            <a:r>
+              <a:rPr sz="1100" b="1">
+                <a:solidFill>
+                  <a:srgbClr val="FBBF24"/>
+                </a:solidFill>
+                <a:latin typeface="Segoe UI"/>
+              </a:rPr>
+              <a:t>Aprobar deja la rendicion lista, pero todavia no la carga en Softland.</a:t>
+            </a:r>
+          </a:p>
+        </p:txBody>
+      </p:sp>
+    </p:spTree>
+  </p:cSld>
+  <p:clrMapOvr>
+    <a:masterClrMapping/>
+  </p:clrMapOvr>
+</p:sld>
+</file>
+
+<file path=ppt/slides/slide14.xml><?xml version="1.0" encoding="utf-8"?>
+<p:sld xmlns:a="http://schemas.openxmlformats.org/drawingml/2006/main" xmlns:p="http://schemas.openxmlformats.org/presentationml/2006/main" xmlns:r="http://schemas.openxmlformats.org/officeDocument/2006/relationships">
+  <p:cSld>
+    <p:spTree>
+      <p:nvGrpSpPr>
+        <p:cNvPr id="1" name=""/>
+        <p:cNvGrpSpPr/>
+        <p:nvPr/>
+      </p:nvGrpSpPr>
+      <p:grpSpPr/>
+      <p:sp>
+        <p:nvSpPr>
+          <p:cNvPr id="2" name="Rectangle 1"/>
+          <p:cNvSpPr/>
+          <p:nvPr/>
+        </p:nvSpPr>
+        <p:spPr>
+          <a:xfrm>
+            <a:off x="0" y="0"/>
+            <a:ext cx="12191695" cy="6858000"/>
+          </a:xfrm>
+          <a:prstGeom prst="rect">
+            <a:avLst/>
+          </a:prstGeom>
+          <a:solidFill>
+            <a:srgbClr val="0F1117"/>
+          </a:solidFill>
+          <a:ln>
+            <a:noFill/>
+          </a:ln>
+          <a:effectLst/>
+        </p:spPr>
+        <p:style>
+          <a:lnRef idx="1">
+            <a:schemeClr val="accent1"/>
+          </a:lnRef>
+          <a:fillRef idx="3">
+            <a:schemeClr val="accent1"/>
+          </a:fillRef>
+          <a:effectRef idx="2">
+            <a:schemeClr val="accent1"/>
+          </a:effectRef>
+          <a:fontRef idx="minor">
+            <a:schemeClr val="lt1"/>
+          </a:fontRef>
+        </p:style>
+        <p:txBody>
+          <a:bodyPr rtlCol="0" anchor="ctr"/>
+          <a:lstStyle/>
+          <a:p>
+            <a:pPr algn="ctr"/>
+          </a:p>
+        </p:txBody>
+      </p:sp>
+      <p:sp>
+        <p:nvSpPr>
+          <p:cNvPr id="3" name="TextBox 2"/>
+          <p:cNvSpPr txBox="1"/>
+          <p:nvPr/>
+        </p:nvSpPr>
+        <p:spPr>
+          <a:xfrm>
+            <a:off x="777240" y="457200"/>
+            <a:ext cx="5486400" cy="329184"/>
+          </a:xfrm>
+          <a:prstGeom prst="rect">
+            <a:avLst/>
+          </a:prstGeom>
+          <a:noFill/>
+        </p:spPr>
+        <p:txBody>
+          <a:bodyPr wrap="square" anchor="t" lIns="0" rIns="0" tIns="0" bIns="0">
+            <a:spAutoFit/>
+          </a:bodyPr>
+          <a:lstStyle/>
+          <a:p>
+            <a:pPr algn="l">
+              <a:lnSpc>
+                <a:spcPct val="115000"/>
+              </a:lnSpc>
+            </a:pPr>
+            <a:r>
+              <a:rPr sz="1300" b="1">
+                <a:solidFill>
+                  <a:srgbClr val="34D399"/>
+                </a:solidFill>
+                <a:latin typeface="Segoe UI"/>
+              </a:rPr>
+              <a:t>PASO 10</a:t>
+            </a:r>
+          </a:p>
+        </p:txBody>
+      </p:sp>
+      <p:sp>
+        <p:nvSpPr>
+          <p:cNvPr id="4" name="TextBox 3"/>
+          <p:cNvSpPr txBox="1"/>
+          <p:nvPr/>
+        </p:nvSpPr>
+        <p:spPr>
+          <a:xfrm>
+            <a:off x="777240" y="804672"/>
+            <a:ext cx="7315200" cy="640080"/>
+          </a:xfrm>
+          <a:prstGeom prst="rect">
+            <a:avLst/>
+          </a:prstGeom>
+          <a:noFill/>
+        </p:spPr>
+        <p:txBody>
+          <a:bodyPr wrap="square" anchor="t" lIns="0" rIns="0" tIns="0" bIns="0">
+            <a:spAutoFit/>
+          </a:bodyPr>
+          <a:lstStyle/>
+          <a:p>
+            <a:pPr algn="l">
+              <a:lnSpc>
+                <a:spcPct val="115000"/>
+              </a:lnSpc>
+            </a:pPr>
+            <a:r>
+              <a:rPr sz="3300" b="1">
+                <a:solidFill>
+                  <a:srgbClr val="FFFFFF"/>
+                </a:solidFill>
+                <a:latin typeface="Segoe UI"/>
+              </a:rPr>
+              <a:t>Cargarla en Softland</a:t>
+            </a:r>
+          </a:p>
+        </p:txBody>
+      </p:sp>
+      <p:sp>
+        <p:nvSpPr>
+          <p:cNvPr id="5" name="TextBox 4"/>
+          <p:cNvSpPr txBox="1"/>
+          <p:nvPr/>
+        </p:nvSpPr>
+        <p:spPr>
+          <a:xfrm>
+            <a:off x="777240" y="1481328"/>
+            <a:ext cx="7863840" cy="411480"/>
+          </a:xfrm>
+          <a:prstGeom prst="rect">
+            <a:avLst/>
+          </a:prstGeom>
+          <a:noFill/>
+        </p:spPr>
+        <p:txBody>
+          <a:bodyPr wrap="square" anchor="t" lIns="0" rIns="0" tIns="0" bIns="0">
+            <a:spAutoFit/>
+          </a:bodyPr>
+          <a:lstStyle/>
+          <a:p>
+            <a:pPr algn="l">
+              <a:lnSpc>
+                <a:spcPct val="115000"/>
+              </a:lnSpc>
+            </a:pPr>
+            <a:r>
+              <a:rPr sz="1600" b="0">
+                <a:solidFill>
+                  <a:srgbClr val="9CA3AF"/>
+                </a:solidFill>
+                <a:latin typeface="Segoe UI"/>
+              </a:rPr>
+              <a:t>Por ahora el sistema no carga solo en Softland: este paso se hace a mano.</a:t>
+            </a:r>
+          </a:p>
+        </p:txBody>
+      </p:sp>
+      <p:sp>
+        <p:nvSpPr>
+          <p:cNvPr id="6" name="Rounded Rectangle 5"/>
+          <p:cNvSpPr/>
+          <p:nvPr/>
+        </p:nvSpPr>
+        <p:spPr>
+          <a:xfrm>
+            <a:off x="731520" y="1993392"/>
+            <a:ext cx="7772400" cy="3712464"/>
+          </a:xfrm>
+          <a:prstGeom prst="roundRect">
+            <a:avLst>
+              <a:gd name="adj" fmla="val 6000"/>
+            </a:avLst>
+          </a:prstGeom>
+          <a:solidFill>
+            <a:srgbClr val="0A0C10"/>
+          </a:solidFill>
+          <a:ln w="12700">
+            <a:solidFill>
+              <a:srgbClr val="2E3442"/>
+            </a:solidFill>
+          </a:ln>
+          <a:effectLst/>
+        </p:spPr>
+        <p:style>
+          <a:lnRef idx="1">
+            <a:schemeClr val="accent1"/>
+          </a:lnRef>
+          <a:fillRef idx="3">
+            <a:schemeClr val="accent1"/>
+          </a:fillRef>
+          <a:effectRef idx="2">
+            <a:schemeClr val="accent1"/>
+          </a:effectRef>
+          <a:fontRef idx="minor">
+            <a:schemeClr val="lt1"/>
+          </a:fontRef>
+        </p:style>
+        <p:txBody>
+          <a:bodyPr rtlCol="0" anchor="ctr"/>
+          <a:lstStyle/>
+          <a:p/>
+        </p:txBody>
+      </p:sp>
+      <p:pic>
+        <p:nvPicPr>
+          <p:cNvPr id="7" name="Picture 6" descr="08_admin_tabla.png"/>
+          <p:cNvPicPr>
+            <a:picLocks noChangeAspect="1"/>
+          </p:cNvPicPr>
+          <p:nvPr/>
+        </p:nvPicPr>
+        <p:blipFill>
+          <a:blip r:embed="rId2"/>
+          <a:stretch>
+            <a:fillRect/>
+          </a:stretch>
+        </p:blipFill>
+        <p:spPr>
+          <a:xfrm>
+            <a:off x="777240" y="2039112"/>
+            <a:ext cx="7680960" cy="3621024"/>
+          </a:xfrm>
+          <a:prstGeom prst="rect">
+            <a:avLst/>
+          </a:prstGeom>
+        </p:spPr>
+      </p:pic>
+      <p:sp>
+        <p:nvSpPr>
+          <p:cNvPr id="8" name="Oval 7"/>
+          <p:cNvSpPr/>
+          <p:nvPr/>
+        </p:nvSpPr>
+        <p:spPr>
+          <a:xfrm>
+            <a:off x="8732520" y="2258568"/>
+            <a:ext cx="109728" cy="109728"/>
+          </a:xfrm>
+          <a:prstGeom prst="ellipse">
+            <a:avLst/>
+          </a:prstGeom>
+          <a:solidFill>
+            <a:srgbClr val="34D399"/>
+          </a:solidFill>
+          <a:ln>
+            <a:noFill/>
+          </a:ln>
+          <a:effectLst/>
+        </p:spPr>
+        <p:style>
+          <a:lnRef idx="1">
+            <a:schemeClr val="accent1"/>
+          </a:lnRef>
+          <a:fillRef idx="3">
+            <a:schemeClr val="accent1"/>
+          </a:fillRef>
+          <a:effectRef idx="2">
+            <a:schemeClr val="accent1"/>
+          </a:effectRef>
+          <a:fontRef idx="minor">
+            <a:schemeClr val="lt1"/>
+          </a:fontRef>
+        </p:style>
+        <p:txBody>
+          <a:bodyPr rtlCol="0" anchor="ctr"/>
+          <a:lstStyle/>
+          <a:p>
+            <a:pPr algn="ctr"/>
+          </a:p>
+        </p:txBody>
+      </p:sp>
+      <p:sp>
+        <p:nvSpPr>
+          <p:cNvPr id="9" name="TextBox 8"/>
+          <p:cNvSpPr txBox="1"/>
+          <p:nvPr/>
+        </p:nvSpPr>
+        <p:spPr>
+          <a:xfrm>
+            <a:off x="9034272" y="2148840"/>
+            <a:ext cx="2514600" cy="822960"/>
+          </a:xfrm>
+          <a:prstGeom prst="rect">
+            <a:avLst/>
+          </a:prstGeom>
+          <a:noFill/>
+        </p:spPr>
+        <p:txBody>
+          <a:bodyPr wrap="square" anchor="t" lIns="0" rIns="0" tIns="0" bIns="0">
+            <a:spAutoFit/>
+          </a:bodyPr>
+          <a:lstStyle/>
+          <a:p>
+            <a:pPr algn="l">
+              <a:lnSpc>
+                <a:spcPct val="130000"/>
+              </a:lnSpc>
+            </a:pPr>
+            <a:r>
+              <a:rPr sz="1300" b="0">
+                <a:solidFill>
+                  <a:srgbClr val="9CA3AF"/>
+                </a:solidFill>
+                <a:latin typeface="Segoe UI"/>
+              </a:rPr>
+              <a:t>1.  Abri el viaje y revisa que este todo bien</a:t>
+            </a:r>
+          </a:p>
+        </p:txBody>
+      </p:sp>
+      <p:sp>
+        <p:nvSpPr>
+          <p:cNvPr id="10" name="Oval 9"/>
+          <p:cNvSpPr/>
+          <p:nvPr/>
+        </p:nvSpPr>
+        <p:spPr>
+          <a:xfrm>
+            <a:off x="8732520" y="3008376"/>
+            <a:ext cx="109728" cy="109728"/>
+          </a:xfrm>
+          <a:prstGeom prst="ellipse">
+            <a:avLst/>
+          </a:prstGeom>
+          <a:solidFill>
+            <a:srgbClr val="34D399"/>
+          </a:solidFill>
+          <a:ln>
+            <a:noFill/>
+          </a:ln>
+          <a:effectLst/>
+        </p:spPr>
+        <p:style>
+          <a:lnRef idx="1">
+            <a:schemeClr val="accent1"/>
+          </a:lnRef>
+          <a:fillRef idx="3">
+            <a:schemeClr val="accent1"/>
+          </a:fillRef>
+          <a:effectRef idx="2">
+            <a:schemeClr val="accent1"/>
+          </a:effectRef>
+          <a:fontRef idx="minor">
+            <a:schemeClr val="lt1"/>
+          </a:fontRef>
+        </p:style>
+        <p:txBody>
+          <a:bodyPr rtlCol="0" anchor="ctr"/>
+          <a:lstStyle/>
+          <a:p>
+            <a:pPr algn="ctr"/>
+          </a:p>
+        </p:txBody>
+      </p:sp>
+      <p:sp>
+        <p:nvSpPr>
+          <p:cNvPr id="11" name="TextBox 10"/>
+          <p:cNvSpPr txBox="1"/>
+          <p:nvPr/>
+        </p:nvSpPr>
+        <p:spPr>
+          <a:xfrm>
+            <a:off x="9034272" y="2898648"/>
+            <a:ext cx="2514600" cy="822960"/>
+          </a:xfrm>
+          <a:prstGeom prst="rect">
+            <a:avLst/>
+          </a:prstGeom>
+          <a:noFill/>
+        </p:spPr>
+        <p:txBody>
+          <a:bodyPr wrap="square" anchor="t" lIns="0" rIns="0" tIns="0" bIns="0">
+            <a:spAutoFit/>
+          </a:bodyPr>
+          <a:lstStyle/>
+          <a:p>
+            <a:pPr algn="l">
+              <a:lnSpc>
+                <a:spcPct val="130000"/>
+              </a:lnSpc>
+            </a:pPr>
+            <a:r>
+              <a:rPr sz="1300" b="0">
+                <a:solidFill>
+                  <a:srgbClr val="9CA3AF"/>
+                </a:solidFill>
+                <a:latin typeface="Segoe UI"/>
+              </a:rPr>
+              <a:t>2.  Toca Copiar tabla (o el boton de una sola fila)</a:t>
+            </a:r>
+          </a:p>
+        </p:txBody>
+      </p:sp>
+      <p:sp>
+        <p:nvSpPr>
+          <p:cNvPr id="12" name="Oval 11"/>
+          <p:cNvSpPr/>
+          <p:nvPr/>
+        </p:nvSpPr>
+        <p:spPr>
+          <a:xfrm>
+            <a:off x="8732520" y="3758184"/>
+            <a:ext cx="109728" cy="109728"/>
+          </a:xfrm>
+          <a:prstGeom prst="ellipse">
+            <a:avLst/>
+          </a:prstGeom>
+          <a:solidFill>
+            <a:srgbClr val="34D399"/>
+          </a:solidFill>
+          <a:ln>
+            <a:noFill/>
+          </a:ln>
+          <a:effectLst/>
+        </p:spPr>
+        <p:style>
+          <a:lnRef idx="1">
+            <a:schemeClr val="accent1"/>
+          </a:lnRef>
+          <a:fillRef idx="3">
+            <a:schemeClr val="accent1"/>
+          </a:fillRef>
+          <a:effectRef idx="2">
+            <a:schemeClr val="accent1"/>
+          </a:effectRef>
+          <a:fontRef idx="minor">
+            <a:schemeClr val="lt1"/>
+          </a:fontRef>
+        </p:style>
+        <p:txBody>
+          <a:bodyPr rtlCol="0" anchor="ctr"/>
+          <a:lstStyle/>
+          <a:p>
+            <a:pPr algn="ctr"/>
+          </a:p>
+        </p:txBody>
+      </p:sp>
+      <p:sp>
+        <p:nvSpPr>
+          <p:cNvPr id="13" name="TextBox 12"/>
+          <p:cNvSpPr txBox="1"/>
+          <p:nvPr/>
+        </p:nvSpPr>
+        <p:spPr>
+          <a:xfrm>
+            <a:off x="9034272" y="3648456"/>
+            <a:ext cx="2514600" cy="822960"/>
+          </a:xfrm>
+          <a:prstGeom prst="rect">
+            <a:avLst/>
+          </a:prstGeom>
+          <a:noFill/>
+        </p:spPr>
+        <p:txBody>
+          <a:bodyPr wrap="square" anchor="t" lIns="0" rIns="0" tIns="0" bIns="0">
+            <a:spAutoFit/>
+          </a:bodyPr>
+          <a:lstStyle/>
+          <a:p>
+            <a:pPr algn="l">
+              <a:lnSpc>
+                <a:spcPct val="130000"/>
+              </a:lnSpc>
+            </a:pPr>
+            <a:r>
+              <a:rPr sz="1300" b="0">
+                <a:solidFill>
+                  <a:srgbClr val="9CA3AF"/>
+                </a:solidFill>
+                <a:latin typeface="Segoe UI"/>
+              </a:rPr>
+              <a:t>3.  En Softland, parate en la primera celda de la fila</a:t>
+            </a:r>
+          </a:p>
+        </p:txBody>
+      </p:sp>
+      <p:sp>
+        <p:nvSpPr>
+          <p:cNvPr id="14" name="Oval 13"/>
+          <p:cNvSpPr/>
+          <p:nvPr/>
+        </p:nvSpPr>
+        <p:spPr>
+          <a:xfrm>
+            <a:off x="8732520" y="4507992"/>
+            <a:ext cx="109728" cy="109728"/>
+          </a:xfrm>
+          <a:prstGeom prst="ellipse">
+            <a:avLst/>
+          </a:prstGeom>
+          <a:solidFill>
+            <a:srgbClr val="34D399"/>
+          </a:solidFill>
+          <a:ln>
+            <a:noFill/>
+          </a:ln>
+          <a:effectLst/>
+        </p:spPr>
+        <p:style>
+          <a:lnRef idx="1">
+            <a:schemeClr val="accent1"/>
+          </a:lnRef>
+          <a:fillRef idx="3">
+            <a:schemeClr val="accent1"/>
+          </a:fillRef>
+          <a:effectRef idx="2">
+            <a:schemeClr val="accent1"/>
+          </a:effectRef>
+          <a:fontRef idx="minor">
+            <a:schemeClr val="lt1"/>
+          </a:fontRef>
+        </p:style>
+        <p:txBody>
+          <a:bodyPr rtlCol="0" anchor="ctr"/>
+          <a:lstStyle/>
+          <a:p>
+            <a:pPr algn="ctr"/>
+          </a:p>
+        </p:txBody>
+      </p:sp>
+      <p:sp>
+        <p:nvSpPr>
+          <p:cNvPr id="15" name="TextBox 14"/>
+          <p:cNvSpPr txBox="1"/>
+          <p:nvPr/>
+        </p:nvSpPr>
+        <p:spPr>
+          <a:xfrm>
+            <a:off x="9034272" y="4398264"/>
+            <a:ext cx="2514600" cy="822960"/>
+          </a:xfrm>
+          <a:prstGeom prst="rect">
+            <a:avLst/>
+          </a:prstGeom>
+          <a:noFill/>
+        </p:spPr>
+        <p:txBody>
+          <a:bodyPr wrap="square" anchor="t" lIns="0" rIns="0" tIns="0" bIns="0">
+            <a:spAutoFit/>
+          </a:bodyPr>
+          <a:lstStyle/>
+          <a:p>
+            <a:pPr algn="l">
+              <a:lnSpc>
+                <a:spcPct val="130000"/>
+              </a:lnSpc>
+            </a:pPr>
+            <a:r>
+              <a:rPr sz="1300" b="0">
+                <a:solidFill>
+                  <a:srgbClr val="9CA3AF"/>
+                </a:solidFill>
+                <a:latin typeface="Segoe UI"/>
+              </a:rPr>
+              <a:t>4.  Pega con Ctrl+V: cada dato cae en su columna</a:t>
+            </a:r>
+          </a:p>
+        </p:txBody>
+      </p:sp>
+      <p:sp>
+        <p:nvSpPr>
+          <p:cNvPr id="16" name="Rounded Rectangle 15"/>
+          <p:cNvSpPr/>
+          <p:nvPr/>
+        </p:nvSpPr>
+        <p:spPr>
+          <a:xfrm>
+            <a:off x="8686800" y="5532120"/>
+            <a:ext cx="2880360" cy="868680"/>
+          </a:xfrm>
+          <a:prstGeom prst="roundRect">
+            <a:avLst>
+              <a:gd name="adj" fmla="val 6000"/>
+            </a:avLst>
+          </a:prstGeom>
+          <a:solidFill>
+            <a:srgbClr val="161A22"/>
+          </a:solidFill>
+          <a:ln w="12700">
+            <a:solidFill>
+              <a:srgbClr val="60A5FA"/>
+            </a:solidFill>
+          </a:ln>
+          <a:effectLst/>
+        </p:spPr>
+        <p:style>
+          <a:lnRef idx="1">
+            <a:schemeClr val="accent1"/>
+          </a:lnRef>
+          <a:fillRef idx="3">
+            <a:schemeClr val="accent1"/>
+          </a:fillRef>
+          <a:effectRef idx="2">
+            <a:schemeClr val="accent1"/>
+          </a:effectRef>
+          <a:fontRef idx="minor">
+            <a:schemeClr val="lt1"/>
+          </a:fontRef>
+        </p:style>
+        <p:txBody>
+          <a:bodyPr rtlCol="0" anchor="ctr"/>
+          <a:lstStyle/>
+          <a:p/>
+        </p:txBody>
+      </p:sp>
+      <p:sp>
+        <p:nvSpPr>
+          <p:cNvPr id="17" name="TextBox 16"/>
+          <p:cNvSpPr txBox="1"/>
+          <p:nvPr/>
+        </p:nvSpPr>
+        <p:spPr>
+          <a:xfrm>
+            <a:off x="8915400" y="5705856"/>
+            <a:ext cx="2468880" cy="548640"/>
+          </a:xfrm>
+          <a:prstGeom prst="rect">
+            <a:avLst/>
+          </a:prstGeom>
+          <a:noFill/>
+        </p:spPr>
+        <p:txBody>
+          <a:bodyPr wrap="square" anchor="t" lIns="0" rIns="0" tIns="0" bIns="0">
+            <a:spAutoFit/>
+          </a:bodyPr>
+          <a:lstStyle/>
+          <a:p>
+            <a:pPr algn="l">
+              <a:lnSpc>
+                <a:spcPct val="125000"/>
+              </a:lnSpc>
+            </a:pPr>
+            <a:r>
+              <a:rPr sz="1100" b="1">
+                <a:solidFill>
+                  <a:srgbClr val="60A5FA"/>
+                </a:solidFill>
+                <a:latin typeface="Segoe UI"/>
+              </a:rPr>
+              <a:t>Las columnas de descripcion se completan solas. No hay que tocarlas.</a:t>
+            </a:r>
+          </a:p>
+        </p:txBody>
+      </p:sp>
+    </p:spTree>
+  </p:cSld>
+  <p:clrMapOvr>
+    <a:masterClrMapping/>
+  </p:clrMapOvr>
+</p:sld>
+</file>
+
+<file path=ppt/slides/slide15.xml><?xml version="1.0" encoding="utf-8"?>
+<p:sld xmlns:a="http://schemas.openxmlformats.org/drawingml/2006/main" xmlns:p="http://schemas.openxmlformats.org/presentationml/2006/main" xmlns:r="http://schemas.openxmlformats.org/officeDocument/2006/relationships">
+  <p:cSld>
+    <p:spTree>
+      <p:nvGrpSpPr>
+        <p:cNvPr id="1" name=""/>
+        <p:cNvGrpSpPr/>
+        <p:nvPr/>
+      </p:nvGrpSpPr>
+      <p:grpSpPr/>
+      <p:sp>
+        <p:nvSpPr>
+          <p:cNvPr id="2" name="Rectangle 1"/>
+          <p:cNvSpPr/>
+          <p:nvPr/>
+        </p:nvSpPr>
+        <p:spPr>
+          <a:xfrm>
+            <a:off x="0" y="0"/>
+            <a:ext cx="12191695" cy="6858000"/>
+          </a:xfrm>
+          <a:prstGeom prst="rect">
+            <a:avLst/>
+          </a:prstGeom>
+          <a:solidFill>
+            <a:srgbClr val="0F1117"/>
+          </a:solidFill>
+          <a:ln>
+            <a:noFill/>
+          </a:ln>
+          <a:effectLst/>
+        </p:spPr>
+        <p:style>
+          <a:lnRef idx="1">
+            <a:schemeClr val="accent1"/>
+          </a:lnRef>
+          <a:fillRef idx="3">
+            <a:schemeClr val="accent1"/>
+          </a:fillRef>
+          <a:effectRef idx="2">
+            <a:schemeClr val="accent1"/>
+          </a:effectRef>
+          <a:fontRef idx="minor">
+            <a:schemeClr val="lt1"/>
+          </a:fontRef>
+        </p:style>
+        <p:txBody>
+          <a:bodyPr rtlCol="0" anchor="ctr"/>
+          <a:lstStyle/>
+          <a:p>
+            <a:pPr algn="ctr"/>
+          </a:p>
+        </p:txBody>
+      </p:sp>
+      <p:sp>
+        <p:nvSpPr>
+          <p:cNvPr id="3" name="Rectangle 2"/>
+          <p:cNvSpPr/>
+          <p:nvPr/>
+        </p:nvSpPr>
+        <p:spPr>
+          <a:xfrm>
+            <a:off x="0" y="0"/>
+            <a:ext cx="100584" cy="6858000"/>
+          </a:xfrm>
+          <a:prstGeom prst="rect">
+            <a:avLst/>
+          </a:prstGeom>
+          <a:solidFill>
+            <a:srgbClr val="34D399"/>
+          </a:solidFill>
+          <a:ln>
+            <a:noFill/>
+          </a:ln>
+          <a:effectLst/>
+        </p:spPr>
+        <p:style>
+          <a:lnRef idx="1">
+            <a:schemeClr val="accent1"/>
+          </a:lnRef>
+          <a:fillRef idx="3">
+            <a:schemeClr val="accent1"/>
+          </a:fillRef>
+          <a:effectRef idx="2">
+            <a:schemeClr val="accent1"/>
+          </a:effectRef>
+          <a:fontRef idx="minor">
+            <a:schemeClr val="lt1"/>
+          </a:fontRef>
+        </p:style>
+        <p:txBody>
+          <a:bodyPr rtlCol="0" anchor="ctr"/>
+          <a:lstStyle/>
+          <a:p/>
+        </p:txBody>
+      </p:sp>
+      <p:sp>
+        <p:nvSpPr>
+          <p:cNvPr id="4" name="TextBox 3"/>
+          <p:cNvSpPr txBox="1"/>
+          <p:nvPr/>
+        </p:nvSpPr>
+        <p:spPr>
+          <a:xfrm>
+            <a:off x="822960" y="868680"/>
+            <a:ext cx="6400800" cy="365760"/>
+          </a:xfrm>
+          <a:prstGeom prst="rect">
+            <a:avLst/>
+          </a:prstGeom>
+          <a:noFill/>
+        </p:spPr>
+        <p:txBody>
+          <a:bodyPr wrap="square" anchor="t" lIns="0" rIns="0" tIns="0" bIns="0">
+            <a:spAutoFit/>
+          </a:bodyPr>
+          <a:lstStyle/>
+          <a:p>
+            <a:pPr algn="l">
+              <a:lnSpc>
+                <a:spcPct val="115000"/>
+              </a:lnSpc>
+            </a:pPr>
+            <a:r>
+              <a:rPr sz="1500" b="1">
+                <a:solidFill>
+                  <a:srgbClr val="34D399"/>
+                </a:solidFill>
+                <a:latin typeface="Segoe UI"/>
+              </a:rPr>
+              <a:t>A PROBARLA</a:t>
+            </a:r>
+          </a:p>
+        </p:txBody>
+      </p:sp>
+      <p:sp>
+        <p:nvSpPr>
+          <p:cNvPr id="5" name="TextBox 4"/>
+          <p:cNvSpPr txBox="1"/>
+          <p:nvPr/>
+        </p:nvSpPr>
+        <p:spPr>
+          <a:xfrm>
+            <a:off x="822960" y="1280160"/>
+            <a:ext cx="8229600" cy="1005840"/>
+          </a:xfrm>
+          <a:prstGeom prst="rect">
+            <a:avLst/>
+          </a:prstGeom>
+          <a:noFill/>
+        </p:spPr>
+        <p:txBody>
+          <a:bodyPr wrap="square" anchor="t" lIns="0" rIns="0" tIns="0" bIns="0">
+            <a:spAutoFit/>
+          </a:bodyPr>
+          <a:lstStyle/>
+          <a:p>
+            <a:pPr algn="l">
+              <a:lnSpc>
+                <a:spcPct val="115000"/>
+              </a:lnSpc>
+            </a:pPr>
+            <a:r>
+              <a:rPr sz="4400" b="1">
+                <a:solidFill>
+                  <a:srgbClr val="FFFFFF"/>
+                </a:solidFill>
+                <a:latin typeface="Segoe UI"/>
+              </a:rPr>
+              <a:t>Entra desde tu telefono</a:t>
+            </a:r>
+          </a:p>
+        </p:txBody>
+      </p:sp>
+      <p:sp>
+        <p:nvSpPr>
+          <p:cNvPr id="6" name="TextBox 5"/>
+          <p:cNvSpPr txBox="1"/>
+          <p:nvPr/>
+        </p:nvSpPr>
+        <p:spPr>
+          <a:xfrm>
+            <a:off x="822960" y="2148840"/>
+            <a:ext cx="8229600" cy="548640"/>
+          </a:xfrm>
+          <a:prstGeom prst="rect">
+            <a:avLst/>
+          </a:prstGeom>
+          <a:noFill/>
+        </p:spPr>
+        <p:txBody>
+          <a:bodyPr wrap="square" anchor="t" lIns="0" rIns="0" tIns="0" bIns="0">
+            <a:spAutoFit/>
+          </a:bodyPr>
+          <a:lstStyle/>
+          <a:p>
+            <a:pPr algn="l">
+              <a:lnSpc>
+                <a:spcPct val="115000"/>
+              </a:lnSpc>
+            </a:pPr>
+            <a:r>
+              <a:rPr sz="1700" b="0">
+                <a:solidFill>
+                  <a:srgbClr val="9CA3AF"/>
+                </a:solidFill>
+                <a:latin typeface="Segoe UI"/>
+              </a:rPr>
+              <a:t>Escanea con la camara. No hay que instalar ninguna aplicacion.</a:t>
+            </a:r>
+          </a:p>
+        </p:txBody>
+      </p:sp>
+      <p:sp>
+        <p:nvSpPr>
+          <p:cNvPr id="7" name="Rounded Rectangle 6"/>
+          <p:cNvSpPr/>
+          <p:nvPr/>
+        </p:nvSpPr>
+        <p:spPr>
+          <a:xfrm>
+            <a:off x="822960" y="2788920"/>
+            <a:ext cx="3017520" cy="3566160"/>
+          </a:xfrm>
+          <a:prstGeom prst="roundRect">
+            <a:avLst>
+              <a:gd name="adj" fmla="val 6000"/>
+            </a:avLst>
+          </a:prstGeom>
+          <a:solidFill>
+            <a:srgbClr val="161A22"/>
+          </a:solidFill>
+          <a:ln w="12700">
+            <a:solidFill>
+              <a:srgbClr val="232833"/>
+            </a:solidFill>
+          </a:ln>
+          <a:effectLst/>
+        </p:spPr>
+        <p:style>
+          <a:lnRef idx="1">
+            <a:schemeClr val="accent1"/>
+          </a:lnRef>
+          <a:fillRef idx="3">
+            <a:schemeClr val="accent1"/>
+          </a:fillRef>
+          <a:effectRef idx="2">
+            <a:schemeClr val="accent1"/>
+          </a:effectRef>
+          <a:fontRef idx="minor">
+            <a:schemeClr val="lt1"/>
+          </a:fontRef>
+        </p:style>
+        <p:txBody>
+          <a:bodyPr rtlCol="0" anchor="ctr"/>
+          <a:lstStyle/>
+          <a:p/>
+        </p:txBody>
+      </p:sp>
+      <p:pic>
+        <p:nvPicPr>
+          <p:cNvPr id="8" name="Picture 7" descr="qr.png"/>
+          <p:cNvPicPr>
+            <a:picLocks noChangeAspect="1"/>
+          </p:cNvPicPr>
+          <p:nvPr/>
+        </p:nvPicPr>
+        <p:blipFill>
+          <a:blip r:embed="rId2"/>
+          <a:stretch>
+            <a:fillRect/>
+          </a:stretch>
+        </p:blipFill>
+        <p:spPr>
+          <a:xfrm>
+            <a:off x="1252728" y="3108960"/>
+            <a:ext cx="2157984" cy="2157984"/>
+          </a:xfrm>
+          <a:prstGeom prst="rect">
+            <a:avLst/>
+          </a:prstGeom>
+        </p:spPr>
+      </p:pic>
+      <p:sp>
+        <p:nvSpPr>
+          <p:cNvPr id="9" name="TextBox 8"/>
+          <p:cNvSpPr txBox="1"/>
+          <p:nvPr/>
+        </p:nvSpPr>
+        <p:spPr>
+          <a:xfrm>
+            <a:off x="822960" y="5449824"/>
+            <a:ext cx="3017520" cy="365760"/>
+          </a:xfrm>
+          <a:prstGeom prst="rect">
+            <a:avLst/>
+          </a:prstGeom>
+          <a:noFill/>
+        </p:spPr>
+        <p:txBody>
+          <a:bodyPr wrap="square" anchor="t" lIns="0" rIns="0" tIns="0" bIns="0">
+            <a:spAutoFit/>
+          </a:bodyPr>
+          <a:lstStyle/>
+          <a:p>
+            <a:pPr algn="ctr">
+              <a:lnSpc>
+                <a:spcPct val="115000"/>
+              </a:lnSpc>
+            </a:pPr>
+            <a:r>
+              <a:rPr sz="1500" b="1">
+                <a:solidFill>
+                  <a:srgbClr val="FFFFFF"/>
+                </a:solidFill>
+                <a:latin typeface="Segoe UI"/>
+              </a:rPr>
+              <a:t>App del chofer</a:t>
+            </a:r>
+          </a:p>
+        </p:txBody>
+      </p:sp>
+      <p:sp>
+        <p:nvSpPr>
+          <p:cNvPr id="10" name="TextBox 9"/>
+          <p:cNvSpPr txBox="1"/>
+          <p:nvPr/>
+        </p:nvSpPr>
+        <p:spPr>
+          <a:xfrm>
+            <a:off x="822960" y="5815584"/>
+            <a:ext cx="3017520" cy="365760"/>
+          </a:xfrm>
+          <a:prstGeom prst="rect">
+            <a:avLst/>
+          </a:prstGeom>
+          <a:noFill/>
+        </p:spPr>
+        <p:txBody>
+          <a:bodyPr wrap="square" anchor="t" lIns="0" rIns="0" tIns="0" bIns="0">
+            <a:spAutoFit/>
+          </a:bodyPr>
+          <a:lstStyle/>
+          <a:p>
+            <a:pPr algn="ctr">
+              <a:lnSpc>
+                <a:spcPct val="115000"/>
+              </a:lnSpc>
+            </a:pPr>
+            <a:r>
+              <a:rPr sz="1000" b="0">
+                <a:solidFill>
+                  <a:srgbClr val="34D399"/>
+                </a:solidFill>
+                <a:latin typeface="Segoe UI"/>
+              </a:rPr>
+              <a:t>liquidaciondeviajes.vercel.app</a:t>
+            </a:r>
+          </a:p>
+        </p:txBody>
+      </p:sp>
+      <p:sp>
+        <p:nvSpPr>
+          <p:cNvPr id="11" name="Rounded Rectangle 10"/>
+          <p:cNvSpPr/>
+          <p:nvPr/>
+        </p:nvSpPr>
+        <p:spPr>
+          <a:xfrm>
+            <a:off x="4160520" y="2788920"/>
+            <a:ext cx="3017520" cy="3566160"/>
+          </a:xfrm>
+          <a:prstGeom prst="roundRect">
+            <a:avLst>
+              <a:gd name="adj" fmla="val 6000"/>
+            </a:avLst>
+          </a:prstGeom>
+          <a:solidFill>
+            <a:srgbClr val="161A22"/>
+          </a:solidFill>
+          <a:ln w="12700">
+            <a:solidFill>
+              <a:srgbClr val="232833"/>
+            </a:solidFill>
+          </a:ln>
+          <a:effectLst/>
+        </p:spPr>
+        <p:style>
+          <a:lnRef idx="1">
+            <a:schemeClr val="accent1"/>
+          </a:lnRef>
+          <a:fillRef idx="3">
+            <a:schemeClr val="accent1"/>
+          </a:fillRef>
+          <a:effectRef idx="2">
+            <a:schemeClr val="accent1"/>
+          </a:effectRef>
+          <a:fontRef idx="minor">
+            <a:schemeClr val="lt1"/>
+          </a:fontRef>
+        </p:style>
+        <p:txBody>
+          <a:bodyPr rtlCol="0" anchor="ctr"/>
+          <a:lstStyle/>
+          <a:p/>
+        </p:txBody>
+      </p:sp>
+      <p:pic>
+        <p:nvPicPr>
+          <p:cNvPr id="12" name="Picture 11" descr="qr_admin.png"/>
+          <p:cNvPicPr>
+            <a:picLocks noChangeAspect="1"/>
+          </p:cNvPicPr>
+          <p:nvPr/>
+        </p:nvPicPr>
+        <p:blipFill>
+          <a:blip r:embed="rId3"/>
+          <a:stretch>
+            <a:fillRect/>
+          </a:stretch>
+        </p:blipFill>
+        <p:spPr>
+          <a:xfrm>
+            <a:off x="4590288" y="3108960"/>
+            <a:ext cx="2157984" cy="2157984"/>
+          </a:xfrm>
+          <a:prstGeom prst="rect">
+            <a:avLst/>
+          </a:prstGeom>
+        </p:spPr>
+      </p:pic>
+      <p:sp>
+        <p:nvSpPr>
+          <p:cNvPr id="13" name="TextBox 12"/>
+          <p:cNvSpPr txBox="1"/>
+          <p:nvPr/>
+        </p:nvSpPr>
+        <p:spPr>
+          <a:xfrm>
+            <a:off x="4160520" y="5449824"/>
+            <a:ext cx="3017520" cy="365760"/>
+          </a:xfrm>
+          <a:prstGeom prst="rect">
+            <a:avLst/>
+          </a:prstGeom>
+          <a:noFill/>
+        </p:spPr>
+        <p:txBody>
+          <a:bodyPr wrap="square" anchor="t" lIns="0" rIns="0" tIns="0" bIns="0">
+            <a:spAutoFit/>
+          </a:bodyPr>
+          <a:lstStyle/>
+          <a:p>
+            <a:pPr algn="ctr">
+              <a:lnSpc>
+                <a:spcPct val="115000"/>
+              </a:lnSpc>
+            </a:pPr>
+            <a:r>
+              <a:rPr sz="1500" b="1">
+                <a:solidFill>
+                  <a:srgbClr val="FFFFFF"/>
+                </a:solidFill>
+                <a:latin typeface="Segoe UI"/>
+              </a:rPr>
+              <a:t>Panel de administracion</a:t>
+            </a:r>
+          </a:p>
+        </p:txBody>
+      </p:sp>
+      <p:sp>
+        <p:nvSpPr>
+          <p:cNvPr id="14" name="TextBox 13"/>
+          <p:cNvSpPr txBox="1"/>
+          <p:nvPr/>
+        </p:nvSpPr>
+        <p:spPr>
+          <a:xfrm>
+            <a:off x="4160520" y="5815584"/>
+            <a:ext cx="3017520" cy="365760"/>
+          </a:xfrm>
+          <a:prstGeom prst="rect">
+            <a:avLst/>
+          </a:prstGeom>
+          <a:noFill/>
+        </p:spPr>
+        <p:txBody>
+          <a:bodyPr wrap="square" anchor="t" lIns="0" rIns="0" tIns="0" bIns="0">
+            <a:spAutoFit/>
+          </a:bodyPr>
+          <a:lstStyle/>
+          <a:p>
+            <a:pPr algn="ctr">
+              <a:lnSpc>
+                <a:spcPct val="115000"/>
+              </a:lnSpc>
+            </a:pPr>
+            <a:r>
+              <a:rPr sz="1000" b="0">
+                <a:solidFill>
+                  <a:srgbClr val="34D399"/>
+                </a:solidFill>
+                <a:latin typeface="Segoe UI"/>
+              </a:rPr>
+              <a:t>/admin/login</a:t>
+            </a:r>
+          </a:p>
+        </p:txBody>
+      </p:sp>
+      <p:sp>
+        <p:nvSpPr>
+          <p:cNvPr id="15" name="Rounded Rectangle 14"/>
+          <p:cNvSpPr/>
+          <p:nvPr/>
+        </p:nvSpPr>
+        <p:spPr>
+          <a:xfrm>
+            <a:off x="7635240" y="2788920"/>
+            <a:ext cx="3749039" cy="3566160"/>
+          </a:xfrm>
+          <a:prstGeom prst="roundRect">
+            <a:avLst>
+              <a:gd name="adj" fmla="val 6000"/>
+            </a:avLst>
+          </a:prstGeom>
+          <a:solidFill>
+            <a:srgbClr val="161A22"/>
+          </a:solidFill>
+          <a:ln w="12700">
+            <a:solidFill>
+              <a:srgbClr val="232833"/>
+            </a:solidFill>
+          </a:ln>
+          <a:effectLst/>
+        </p:spPr>
+        <p:style>
+          <a:lnRef idx="1">
+            <a:schemeClr val="accent1"/>
+          </a:lnRef>
+          <a:fillRef idx="3">
+            <a:schemeClr val="accent1"/>
+          </a:fillRef>
+          <a:effectRef idx="2">
+            <a:schemeClr val="accent1"/>
+          </a:effectRef>
+          <a:fontRef idx="minor">
+            <a:schemeClr val="lt1"/>
+          </a:fontRef>
+        </p:style>
+        <p:txBody>
+          <a:bodyPr rtlCol="0" anchor="ctr"/>
+          <a:lstStyle/>
+          <a:p/>
+        </p:txBody>
+      </p:sp>
+      <p:sp>
+        <p:nvSpPr>
+          <p:cNvPr id="16" name="TextBox 15"/>
+          <p:cNvSpPr txBox="1"/>
+          <p:nvPr/>
+        </p:nvSpPr>
+        <p:spPr>
+          <a:xfrm>
+            <a:off x="7955279" y="3063240"/>
+            <a:ext cx="3200400" cy="365760"/>
+          </a:xfrm>
+          <a:prstGeom prst="rect">
+            <a:avLst/>
+          </a:prstGeom>
+          <a:noFill/>
+        </p:spPr>
+        <p:txBody>
+          <a:bodyPr wrap="square" anchor="t" lIns="0" rIns="0" tIns="0" bIns="0">
+            <a:spAutoFit/>
+          </a:bodyPr>
+          <a:lstStyle/>
+          <a:p>
+            <a:pPr algn="l">
+              <a:lnSpc>
+                <a:spcPct val="115000"/>
+              </a:lnSpc>
+            </a:pPr>
+            <a:r>
+              <a:rPr sz="1200" b="1">
+                <a:solidFill>
+                  <a:srgbClr val="FBBF24"/>
+                </a:solidFill>
+                <a:latin typeface="Segoe UI"/>
+              </a:rPr>
+              <a:t>PARA TENER EN CUENTA</a:t>
+            </a:r>
+          </a:p>
+        </p:txBody>
+      </p:sp>
+      <p:sp>
+        <p:nvSpPr>
+          <p:cNvPr id="17" name="TextBox 16"/>
+          <p:cNvSpPr txBox="1"/>
+          <p:nvPr/>
+        </p:nvSpPr>
+        <p:spPr>
+          <a:xfrm>
+            <a:off x="7955279" y="3520440"/>
+            <a:ext cx="3200400" cy="2560320"/>
+          </a:xfrm>
+          <a:prstGeom prst="rect">
+            <a:avLst/>
+          </a:prstGeom>
+          <a:noFill/>
+        </p:spPr>
+        <p:txBody>
+          <a:bodyPr wrap="square" anchor="t" lIns="0" rIns="0" tIns="0" bIns="0">
+            <a:spAutoFit/>
+          </a:bodyPr>
+          <a:lstStyle/>
+          <a:p>
+            <a:pPr algn="l">
+              <a:lnSpc>
+                <a:spcPct val="125000"/>
+              </a:lnSpc>
+            </a:pPr>
+            <a:r>
+              <a:rPr sz="1400" b="0">
+                <a:solidFill>
+                  <a:srgbClr val="9CA3AF"/>
+                </a:solidFill>
+                <a:latin typeface="Segoe UI"/>
+              </a:rPr>
+              <a:t>Carga el gasto en el momento,</a:t>
+            </a:r>
+          </a:p>
+          <a:p>
+            <a:pPr algn="l">
+              <a:lnSpc>
+                <a:spcPct val="125000"/>
+              </a:lnSpc>
+            </a:pPr>
+            <a:r>
+              <a:rPr sz="1400" b="0">
+                <a:solidFill>
+                  <a:srgbClr val="9CA3AF"/>
+                </a:solidFill>
+                <a:latin typeface="Segoe UI"/>
+              </a:rPr>
+              <a:t>no lo dejes para despues</a:t>
+            </a:r>
+          </a:p>
+          <a:p>
+            <a:pPr algn="l">
+              <a:lnSpc>
+                <a:spcPct val="125000"/>
+              </a:lnSpc>
+            </a:pPr>
+          </a:p>
+          <a:p>
+            <a:pPr algn="l">
+              <a:lnSpc>
+                <a:spcPct val="125000"/>
+              </a:lnSpc>
+            </a:pPr>
+            <a:r>
+              <a:rPr sz="1400" b="0">
+                <a:solidFill>
+                  <a:srgbClr val="9CA3AF"/>
+                </a:solidFill>
+                <a:latin typeface="Segoe UI"/>
+              </a:rPr>
+              <a:t>Que el ticket entre completo</a:t>
+            </a:r>
+          </a:p>
+          <a:p>
+            <a:pPr algn="l">
+              <a:lnSpc>
+                <a:spcPct val="125000"/>
+              </a:lnSpc>
+            </a:pPr>
+            <a:r>
+              <a:rPr sz="1400" b="0">
+                <a:solidFill>
+                  <a:srgbClr val="9CA3AF"/>
+                </a:solidFill>
+                <a:latin typeface="Segoe UI"/>
+              </a:rPr>
+              <a:t>en la foto</a:t>
+            </a:r>
+          </a:p>
+          <a:p>
+            <a:pPr algn="l">
+              <a:lnSpc>
+                <a:spcPct val="125000"/>
+              </a:lnSpc>
+            </a:pPr>
+          </a:p>
+          <a:p>
+            <a:pPr algn="l">
+              <a:lnSpc>
+                <a:spcPct val="125000"/>
+              </a:lnSpc>
+            </a:pPr>
+            <a:r>
+              <a:rPr sz="1400" b="0">
+                <a:solidFill>
+                  <a:srgbClr val="9CA3AF"/>
+                </a:solidFill>
+                <a:latin typeface="Segoe UI"/>
+              </a:rPr>
+              <a:t>Si el importe salio mal,</a:t>
+            </a:r>
+          </a:p>
+          <a:p>
+            <a:pPr algn="l">
+              <a:lnSpc>
+                <a:spcPct val="125000"/>
+              </a:lnSpc>
+            </a:pPr>
+            <a:r>
+              <a:rPr sz="1400" b="0">
+                <a:solidFill>
+                  <a:srgbClr val="9CA3AF"/>
+                </a:solidFill>
+                <a:latin typeface="Segoe UI"/>
+              </a:rPr>
+              <a:t>corregilo antes de guardar</a:t>
             </a:r>
           </a:p>
         </p:txBody>
@@ -4725,133 +8797,16 @@
       </p:sp>
       <p:sp>
         <p:nvSpPr>
-          <p:cNvPr id="3" name="TextBox 2"/>
-          <p:cNvSpPr txBox="1"/>
-          <p:nvPr/>
-        </p:nvSpPr>
-        <p:spPr>
-          <a:xfrm>
-            <a:off x="822960" y="658368"/>
-            <a:ext cx="5486400" cy="365760"/>
-          </a:xfrm>
-          <a:prstGeom prst="rect">
-            <a:avLst/>
-          </a:prstGeom>
-          <a:noFill/>
-        </p:spPr>
-        <p:txBody>
-          <a:bodyPr wrap="square" anchor="t" lIns="0" rIns="0" tIns="0" bIns="0">
-            <a:spAutoFit/>
-          </a:bodyPr>
-          <a:lstStyle/>
-          <a:p>
-            <a:pPr algn="l">
-              <a:lnSpc>
-                <a:spcPct val="115000"/>
-              </a:lnSpc>
-            </a:pPr>
-            <a:r>
-              <a:rPr sz="1400" b="1">
-                <a:solidFill>
-                  <a:srgbClr val="34D399"/>
-                </a:solidFill>
-                <a:latin typeface="Segoe UI"/>
-              </a:rPr>
-              <a:t>PASO 1</a:t>
-            </a:r>
-          </a:p>
-        </p:txBody>
-      </p:sp>
-      <p:sp>
-        <p:nvSpPr>
-          <p:cNvPr id="4" name="TextBox 3"/>
-          <p:cNvSpPr txBox="1"/>
-          <p:nvPr/>
-        </p:nvSpPr>
-        <p:spPr>
-          <a:xfrm>
-            <a:off x="822960" y="1051560"/>
-            <a:ext cx="6766560" cy="777240"/>
-          </a:xfrm>
-          <a:prstGeom prst="rect">
-            <a:avLst/>
-          </a:prstGeom>
-          <a:noFill/>
-        </p:spPr>
-        <p:txBody>
-          <a:bodyPr wrap="square" anchor="t" lIns="0" rIns="0" tIns="0" bIns="0">
-            <a:spAutoFit/>
-          </a:bodyPr>
-          <a:lstStyle/>
-          <a:p>
-            <a:pPr algn="l">
-              <a:lnSpc>
-                <a:spcPct val="115000"/>
-              </a:lnSpc>
-            </a:pPr>
-            <a:r>
-              <a:rPr sz="3800" b="1">
-                <a:solidFill>
-                  <a:srgbClr val="FFFFFF"/>
-                </a:solidFill>
-                <a:latin typeface="Segoe UI"/>
-              </a:rPr>
-              <a:t>Ingresa a la app</a:t>
-            </a:r>
-          </a:p>
-        </p:txBody>
-      </p:sp>
-      <p:sp>
-        <p:nvSpPr>
-          <p:cNvPr id="5" name="TextBox 4"/>
-          <p:cNvSpPr txBox="1"/>
-          <p:nvPr/>
-        </p:nvSpPr>
-        <p:spPr>
-          <a:xfrm>
-            <a:off x="822960" y="1874519"/>
-            <a:ext cx="6583680" cy="502920"/>
-          </a:xfrm>
-          <a:prstGeom prst="rect">
-            <a:avLst/>
-          </a:prstGeom>
-          <a:noFill/>
-        </p:spPr>
-        <p:txBody>
-          <a:bodyPr wrap="square" anchor="t" lIns="0" rIns="0" tIns="0" bIns="0">
-            <a:spAutoFit/>
-          </a:bodyPr>
-          <a:lstStyle/>
-          <a:p>
-            <a:pPr algn="l">
-              <a:lnSpc>
-                <a:spcPct val="125000"/>
-              </a:lnSpc>
-            </a:pPr>
-            <a:r>
-              <a:rPr sz="1800" b="0">
-                <a:solidFill>
-                  <a:srgbClr val="9CA3AF"/>
-                </a:solidFill>
-                <a:latin typeface="Segoe UI"/>
-              </a:rPr>
-              <a:t>Dos datos y listo. No hay usuario ni contrasena.</a:t>
-            </a:r>
-          </a:p>
-        </p:txBody>
-      </p:sp>
-      <p:sp>
-        <p:nvSpPr>
-          <p:cNvPr id="6" name="Oval 5"/>
+          <p:cNvPr id="3" name="Rectangle 2"/>
           <p:cNvSpPr/>
           <p:nvPr/>
         </p:nvSpPr>
         <p:spPr>
           <a:xfrm>
-            <a:off x="868680" y="2807208"/>
-            <a:ext cx="118872" cy="118872"/>
-          </a:xfrm>
-          <a:prstGeom prst="ellipse">
+            <a:off x="0" y="0"/>
+            <a:ext cx="100584" cy="6858000"/>
+          </a:xfrm>
+          <a:prstGeom prst="rect">
             <a:avLst/>
           </a:prstGeom>
           <a:solidFill>
@@ -4879,21 +8834,19 @@
         <p:txBody>
           <a:bodyPr rtlCol="0" anchor="ctr"/>
           <a:lstStyle/>
-          <a:p>
-            <a:pPr algn="ctr"/>
-          </a:p>
-        </p:txBody>
-      </p:sp>
-      <p:sp>
-        <p:nvSpPr>
-          <p:cNvPr id="7" name="TextBox 6"/>
+          <a:p/>
+        </p:txBody>
+      </p:sp>
+      <p:sp>
+        <p:nvSpPr>
+          <p:cNvPr id="4" name="TextBox 3"/>
           <p:cNvSpPr txBox="1"/>
           <p:nvPr/>
         </p:nvSpPr>
         <p:spPr>
           <a:xfrm>
-            <a:off x="1234440" y="2697480"/>
-            <a:ext cx="6035040" cy="548640"/>
+            <a:off x="1005840" y="1828800"/>
+            <a:ext cx="2743200" cy="1280160"/>
           </a:xfrm>
           <a:prstGeom prst="rect">
             <a:avLst/>
@@ -4908,30 +8861,108 @@
           <a:p>
             <a:pPr algn="l">
               <a:lnSpc>
-                <a:spcPct val="130000"/>
+                <a:spcPct val="115000"/>
               </a:lnSpc>
             </a:pPr>
             <a:r>
-              <a:rPr sz="1600" b="0">
-                <a:solidFill>
-                  <a:srgbClr val="9CA3AF"/>
-                </a:solidFill>
-                <a:latin typeface="Segoe UI"/>
-              </a:rPr>
-              <a:t>Escribi tu apellido y elegite de la lista</a:t>
-            </a:r>
-          </a:p>
-        </p:txBody>
-      </p:sp>
-      <p:sp>
-        <p:nvSpPr>
-          <p:cNvPr id="8" name="Oval 7"/>
+              <a:rPr sz="9600" b="1">
+                <a:solidFill>
+                  <a:srgbClr val="103C30"/>
+                </a:solidFill>
+                <a:latin typeface="Segoe UI"/>
+              </a:rPr>
+              <a:t>1</a:t>
+            </a:r>
+          </a:p>
+        </p:txBody>
+      </p:sp>
+      <p:sp>
+        <p:nvSpPr>
+          <p:cNvPr id="5" name="TextBox 4"/>
+          <p:cNvSpPr txBox="1"/>
+          <p:nvPr/>
+        </p:nvSpPr>
+        <p:spPr>
+          <a:xfrm>
+            <a:off x="1005840" y="2148840"/>
+            <a:ext cx="6400800" cy="457200"/>
+          </a:xfrm>
+          <a:prstGeom prst="rect">
+            <a:avLst/>
+          </a:prstGeom>
+          <a:noFill/>
+        </p:spPr>
+        <p:txBody>
+          <a:bodyPr wrap="square" anchor="t" lIns="0" rIns="0" tIns="0" bIns="0">
+            <a:spAutoFit/>
+          </a:bodyPr>
+          <a:lstStyle/>
+          <a:p>
+            <a:pPr algn="l">
+              <a:lnSpc>
+                <a:spcPct val="115000"/>
+              </a:lnSpc>
+            </a:pPr>
+            <a:r>
+              <a:rPr sz="1500" b="1">
+                <a:solidFill>
+                  <a:srgbClr val="34D399"/>
+                </a:solidFill>
+                <a:latin typeface="Segoe UI"/>
+              </a:rPr>
+              <a:t>PRIMERA PARTE</a:t>
+            </a:r>
+          </a:p>
+        </p:txBody>
+      </p:sp>
+      <p:sp>
+        <p:nvSpPr>
+          <p:cNvPr id="6" name="TextBox 5"/>
+          <p:cNvSpPr txBox="1"/>
+          <p:nvPr/>
+        </p:nvSpPr>
+        <p:spPr>
+          <a:xfrm>
+            <a:off x="1005840" y="2606040"/>
+            <a:ext cx="7315200" cy="1097280"/>
+          </a:xfrm>
+          <a:prstGeom prst="rect">
+            <a:avLst/>
+          </a:prstGeom>
+          <a:noFill/>
+        </p:spPr>
+        <p:txBody>
+          <a:bodyPr wrap="square" anchor="t" lIns="0" rIns="0" tIns="0" bIns="0">
+            <a:spAutoFit/>
+          </a:bodyPr>
+          <a:lstStyle/>
+          <a:p>
+            <a:pPr algn="l">
+              <a:lnSpc>
+                <a:spcPct val="115000"/>
+              </a:lnSpc>
+            </a:pPr>
+            <a:r>
+              <a:rPr sz="4400" b="1">
+                <a:solidFill>
+                  <a:srgbClr val="FFFFFF"/>
+                </a:solidFill>
+                <a:latin typeface="Segoe UI"/>
+              </a:rPr>
+              <a:t>El chofer</a:t>
+            </a:r>
+          </a:p>
+        </p:txBody>
+      </p:sp>
+      <p:sp>
+        <p:nvSpPr>
+          <p:cNvPr id="7" name="Oval 6"/>
           <p:cNvSpPr/>
           <p:nvPr/>
         </p:nvSpPr>
         <p:spPr>
           <a:xfrm>
-            <a:off x="868680" y="3465576"/>
+            <a:off x="1051560" y="4279392"/>
             <a:ext cx="118872" cy="118872"/>
           </a:xfrm>
           <a:prstGeom prst="ellipse">
@@ -4969,14 +9000,14 @@
       </p:sp>
       <p:sp>
         <p:nvSpPr>
-          <p:cNvPr id="9" name="TextBox 8"/>
+          <p:cNvPr id="8" name="TextBox 7"/>
           <p:cNvSpPr txBox="1"/>
           <p:nvPr/>
         </p:nvSpPr>
         <p:spPr>
           <a:xfrm>
-            <a:off x="1234440" y="3355848"/>
-            <a:ext cx="6035040" cy="548640"/>
+            <a:off x="1417320" y="4160520"/>
+            <a:ext cx="8229600" cy="457200"/>
           </a:xfrm>
           <a:prstGeom prst="rect">
             <a:avLst/>
@@ -4991,7 +9022,7 @@
           <a:p>
             <a:pPr algn="l">
               <a:lnSpc>
-                <a:spcPct val="130000"/>
+                <a:spcPct val="115000"/>
               </a:lnSpc>
             </a:pPr>
             <a:r>
@@ -5001,20 +9032,20 @@
                 </a:solidFill>
                 <a:latin typeface="Segoe UI"/>
               </a:rPr>
-              <a:t>Escribi la patente de tu camion y elegila</a:t>
-            </a:r>
-          </a:p>
-        </p:txBody>
-      </p:sp>
-      <p:sp>
-        <p:nvSpPr>
-          <p:cNvPr id="10" name="Oval 9"/>
+              <a:t>Ingresa con su nombre y su camion</a:t>
+            </a:r>
+          </a:p>
+        </p:txBody>
+      </p:sp>
+      <p:sp>
+        <p:nvSpPr>
+          <p:cNvPr id="9" name="Oval 8"/>
           <p:cNvSpPr/>
           <p:nvPr/>
         </p:nvSpPr>
         <p:spPr>
           <a:xfrm>
-            <a:off x="868680" y="4123944"/>
+            <a:off x="1051560" y="4846320"/>
             <a:ext cx="118872" cy="118872"/>
           </a:xfrm>
           <a:prstGeom prst="ellipse">
@@ -5052,14 +9083,14 @@
       </p:sp>
       <p:sp>
         <p:nvSpPr>
-          <p:cNvPr id="11" name="TextBox 10"/>
+          <p:cNvPr id="10" name="TextBox 9"/>
           <p:cNvSpPr txBox="1"/>
           <p:nvPr/>
         </p:nvSpPr>
         <p:spPr>
           <a:xfrm>
-            <a:off x="1234440" y="4014216"/>
-            <a:ext cx="6035040" cy="548640"/>
+            <a:off x="1417320" y="4727448"/>
+            <a:ext cx="8229600" cy="457200"/>
           </a:xfrm>
           <a:prstGeom prst="rect">
             <a:avLst/>
@@ -5074,7 +9105,7 @@
           <a:p>
             <a:pPr algn="l">
               <a:lnSpc>
-                <a:spcPct val="130000"/>
+                <a:spcPct val="115000"/>
               </a:lnSpc>
             </a:pPr>
             <a:r>
@@ -5084,20 +9115,20 @@
                 </a:solidFill>
                 <a:latin typeface="Segoe UI"/>
               </a:rPr>
-              <a:t>Fijate que los dos datos queden en verde y azul</a:t>
-            </a:r>
-          </a:p>
-        </p:txBody>
-      </p:sp>
-      <p:sp>
-        <p:nvSpPr>
-          <p:cNvPr id="12" name="Oval 11"/>
+              <a:t>El sistema le muestra el viaje que esta haciendo</a:t>
+            </a:r>
+          </a:p>
+        </p:txBody>
+      </p:sp>
+      <p:sp>
+        <p:nvSpPr>
+          <p:cNvPr id="11" name="Oval 10"/>
           <p:cNvSpPr/>
           <p:nvPr/>
         </p:nvSpPr>
         <p:spPr>
           <a:xfrm>
-            <a:off x="868680" y="4782312"/>
+            <a:off x="1051560" y="5413248"/>
             <a:ext cx="118872" cy="118872"/>
           </a:xfrm>
           <a:prstGeom prst="ellipse">
@@ -5135,14 +9166,14 @@
       </p:sp>
       <p:sp>
         <p:nvSpPr>
-          <p:cNvPr id="13" name="TextBox 12"/>
+          <p:cNvPr id="12" name="TextBox 11"/>
           <p:cNvSpPr txBox="1"/>
           <p:nvPr/>
         </p:nvSpPr>
         <p:spPr>
           <a:xfrm>
-            <a:off x="1234440" y="4672584"/>
-            <a:ext cx="6035040" cy="548640"/>
+            <a:off x="1417320" y="5294376"/>
+            <a:ext cx="8229600" cy="457200"/>
           </a:xfrm>
           <a:prstGeom prst="rect">
             <a:avLst/>
@@ -5157,7 +9188,7 @@
           <a:p>
             <a:pPr algn="l">
               <a:lnSpc>
-                <a:spcPct val="130000"/>
+                <a:spcPct val="115000"/>
               </a:lnSpc>
             </a:pPr>
             <a:r>
@@ -5167,34 +9198,30 @@
                 </a:solidFill>
                 <a:latin typeface="Segoe UI"/>
               </a:rPr>
-              <a:t>Toca Ingresar</a:t>
-            </a:r>
-          </a:p>
-        </p:txBody>
-      </p:sp>
-      <p:sp>
-        <p:nvSpPr>
-          <p:cNvPr id="14" name="Rounded Rectangle 13"/>
+              <a:t>Saca la foto del ticket y la IA completa los datos</a:t>
+            </a:r>
+          </a:p>
+        </p:txBody>
+      </p:sp>
+      <p:sp>
+        <p:nvSpPr>
+          <p:cNvPr id="13" name="Oval 12"/>
           <p:cNvSpPr/>
           <p:nvPr/>
         </p:nvSpPr>
         <p:spPr>
           <a:xfrm>
-            <a:off x="822960" y="5257800"/>
-            <a:ext cx="6675120" cy="841248"/>
-          </a:xfrm>
-          <a:prstGeom prst="roundRect">
-            <a:avLst>
-              <a:gd name="adj" fmla="val 6000"/>
-            </a:avLst>
+            <a:off x="1051560" y="5980176"/>
+            <a:ext cx="118872" cy="118872"/>
+          </a:xfrm>
+          <a:prstGeom prst="ellipse">
+            <a:avLst/>
           </a:prstGeom>
           <a:solidFill>
-            <a:srgbClr val="161A22"/>
+            <a:srgbClr val="34D399"/>
           </a:solidFill>
-          <a:ln w="12700">
-            <a:solidFill>
-              <a:srgbClr val="60A5FA"/>
-            </a:solidFill>
+          <a:ln>
+            <a:noFill/>
           </a:ln>
           <a:effectLst/>
         </p:spPr>
@@ -5215,19 +9242,21 @@
         <p:txBody>
           <a:bodyPr rtlCol="0" anchor="ctr"/>
           <a:lstStyle/>
-          <a:p/>
-        </p:txBody>
-      </p:sp>
-      <p:sp>
-        <p:nvSpPr>
-          <p:cNvPr id="15" name="TextBox 14"/>
+          <a:p>
+            <a:pPr algn="ctr"/>
+          </a:p>
+        </p:txBody>
+      </p:sp>
+      <p:sp>
+        <p:nvSpPr>
+          <p:cNvPr id="14" name="TextBox 13"/>
           <p:cNvSpPr txBox="1"/>
           <p:nvPr/>
         </p:nvSpPr>
         <p:spPr>
           <a:xfrm>
-            <a:off x="1143000" y="5504688"/>
-            <a:ext cx="6126480" cy="457200"/>
+            <a:off x="1417320" y="5861304"/>
+            <a:ext cx="8229600" cy="457200"/>
           </a:xfrm>
           <a:prstGeom prst="rect">
             <a:avLst/>
@@ -5246,87 +9275,17 @@
               </a:lnSpc>
             </a:pPr>
             <a:r>
-              <a:rPr sz="1400" b="1">
-                <a:solidFill>
-                  <a:srgbClr val="60A5FA"/>
-                </a:solidFill>
-                <a:latin typeface="Segoe UI"/>
-              </a:rPr>
-              <a:t>Importante: elegi TU camion. Si elegis otro, no vas a ver tu viaje.</a:t>
-            </a:r>
-          </a:p>
-        </p:txBody>
-      </p:sp>
-      <p:sp>
-        <p:nvSpPr>
-          <p:cNvPr id="16" name="Rounded Rectangle 15"/>
-          <p:cNvSpPr/>
-          <p:nvPr/>
-        </p:nvSpPr>
-        <p:spPr>
-          <a:xfrm>
-            <a:off x="8613648" y="566928"/>
-            <a:ext cx="2788920" cy="5724144"/>
-          </a:xfrm>
-          <a:prstGeom prst="roundRect">
-            <a:avLst>
-              <a:gd name="adj" fmla="val 6000"/>
-            </a:avLst>
-          </a:prstGeom>
-          <a:solidFill>
-            <a:srgbClr val="0A0C10"/>
-          </a:solidFill>
-          <a:ln w="12700">
-            <a:solidFill>
-              <a:srgbClr val="2E3442"/>
-            </a:solidFill>
-          </a:ln>
-          <a:effectLst/>
-        </p:spPr>
-        <p:style>
-          <a:lnRef idx="1">
-            <a:schemeClr val="accent1"/>
-          </a:lnRef>
-          <a:fillRef idx="3">
-            <a:schemeClr val="accent1"/>
-          </a:fillRef>
-          <a:effectRef idx="2">
-            <a:schemeClr val="accent1"/>
-          </a:effectRef>
-          <a:fontRef idx="minor">
-            <a:schemeClr val="lt1"/>
-          </a:fontRef>
-        </p:style>
-        <p:txBody>
-          <a:bodyPr rtlCol="0" anchor="ctr"/>
-          <a:lstStyle/>
-          <a:p/>
-        </p:txBody>
-      </p:sp>
-      <p:pic>
-        <p:nvPicPr>
-          <p:cNvPr id="17" name="Picture 16" descr="01_login.png"/>
-          <p:cNvPicPr>
-            <a:picLocks noChangeAspect="1"/>
-          </p:cNvPicPr>
-          <p:nvPr/>
-        </p:nvPicPr>
-        <p:blipFill>
-          <a:blip r:embed="rId2"/>
-          <a:stretch>
-            <a:fillRect/>
-          </a:stretch>
-        </p:blipFill>
-        <p:spPr>
-          <a:xfrm>
-            <a:off x="8732520" y="685800"/>
-            <a:ext cx="2551176" cy="5486400"/>
-          </a:xfrm>
-          <a:prstGeom prst="rect">
-            <a:avLst/>
-          </a:prstGeom>
-        </p:spPr>
-      </p:pic>
+              <a:rPr sz="1600" b="0">
+                <a:solidFill>
+                  <a:srgbClr val="9CA3AF"/>
+                </a:solidFill>
+                <a:latin typeface="Segoe UI"/>
+              </a:rPr>
+              <a:t>Puede consultar lo que lleva cargado en ese viaje</a:t>
+            </a:r>
+          </a:p>
+        </p:txBody>
+      </p:sp>
     </p:spTree>
   </p:cSld>
   <p:clrMapOvr>
@@ -5423,7 +9382,7 @@
                 </a:solidFill>
                 <a:latin typeface="Segoe UI"/>
               </a:rPr>
-              <a:t>PASO 2</a:t>
+              <a:t>PASO 1</a:t>
             </a:r>
           </a:p>
         </p:txBody>
@@ -5462,7 +9421,7 @@
                 </a:solidFill>
                 <a:latin typeface="Segoe UI"/>
               </a:rPr>
-              <a:t>El sistema busca tu viaje</a:t>
+              <a:t>Ingresa a la app</a:t>
             </a:r>
           </a:p>
         </p:txBody>
@@ -5501,7 +9460,7 @@
                 </a:solidFill>
                 <a:latin typeface="Segoe UI"/>
               </a:rPr>
-              <a:t>No tenes que elegir nada: la app sabe cual es tu hoja de ruta.</a:t>
+              <a:t>Dos datos y listo. No hay usuario ni contrasena.</a:t>
             </a:r>
           </a:p>
         </p:txBody>
@@ -5584,7 +9543,7 @@
                 </a:solidFill>
                 <a:latin typeface="Segoe UI"/>
               </a:rPr>
-              <a:t>Aparece el numero de viaje que te toca hoy</a:t>
+              <a:t>Escribi tu apellido y elegite de la lista</a:t>
             </a:r>
           </a:p>
         </p:txBody>
@@ -5667,7 +9626,7 @@
                 </a:solidFill>
                 <a:latin typeface="Segoe UI"/>
               </a:rPr>
-              <a:t>Con el tractor, el semi y la fecha de salida</a:t>
+              <a:t>Escribi la patente de tu camion y elegila</a:t>
             </a:r>
           </a:p>
         </p:txBody>
@@ -5750,7 +9709,7 @@
                 </a:solidFill>
                 <a:latin typeface="Segoe UI"/>
               </a:rPr>
-              <a:t>Si dice TIEMPO REAL, salio del sistema de la empresa</a:t>
+              <a:t>Fijate que los dos datos queden en verde y azul</a:t>
             </a:r>
           </a:p>
         </p:txBody>
@@ -5833,7 +9792,7 @@
                 </a:solidFill>
                 <a:latin typeface="Segoe UI"/>
               </a:rPr>
-              <a:t>Toca Agregar gasto a este viaje</a:t>
+              <a:t>Toca Ingresar</a:t>
             </a:r>
           </a:p>
         </p:txBody>
@@ -5859,7 +9818,7 @@
           </a:solidFill>
           <a:ln w="12700">
             <a:solidFill>
-              <a:srgbClr val="FBBF24"/>
+              <a:srgbClr val="60A5FA"/>
             </a:solidFill>
           </a:ln>
           <a:effectLst/>
@@ -5914,11 +9873,11 @@
             <a:r>
               <a:rPr sz="1400" b="1">
                 <a:solidFill>
-                  <a:srgbClr val="FBBF24"/>
-                </a:solidFill>
-                <a:latin typeface="Segoe UI"/>
-              </a:rPr>
-              <a:t>Si no aparece ningun viaje, revisa que hayas elegido bien tu camion.</a:t>
+                  <a:srgbClr val="60A5FA"/>
+                </a:solidFill>
+                <a:latin typeface="Segoe UI"/>
+              </a:rPr>
+              <a:t>Elegi TU camion. Con el de otro chofer no vas a ver ningun viaje.</a:t>
             </a:r>
           </a:p>
         </p:txBody>
@@ -5971,7 +9930,7 @@
       </p:sp>
       <p:pic>
         <p:nvPicPr>
-          <p:cNvPr id="17" name="Picture 16" descr="02_viaje.png"/>
+          <p:cNvPr id="17" name="Picture 16" descr="01_login.png"/>
           <p:cNvPicPr>
             <a:picLocks noChangeAspect="1"/>
           </p:cNvPicPr>
@@ -6089,7 +10048,7 @@
                 </a:solidFill>
                 <a:latin typeface="Segoe UI"/>
               </a:rPr>
-              <a:t>PASO 3</a:t>
+              <a:t>PASO 2</a:t>
             </a:r>
           </a:p>
         </p:txBody>
@@ -6128,7 +10087,7 @@
                 </a:solidFill>
                 <a:latin typeface="Segoe UI"/>
               </a:rPr>
-              <a:t>Sacale la foto al ticket</a:t>
+              <a:t>El sistema busca tu viaje</a:t>
             </a:r>
           </a:p>
         </p:txBody>
@@ -6167,7 +10126,7 @@
                 </a:solidFill>
                 <a:latin typeface="Segoe UI"/>
               </a:rPr>
-              <a:t>Este es el unico paso que realmente hacas vos.</a:t>
+              <a:t>No tenes que elegir nada: la app sabe cual es tu hoja de ruta.</a:t>
             </a:r>
           </a:p>
         </p:txBody>
@@ -6250,7 +10209,7 @@
                 </a:solidFill>
                 <a:latin typeface="Segoe UI"/>
               </a:rPr>
-              <a:t>Toca el boton de la camara</a:t>
+              <a:t>Aparece el numero de viaje que estas haciendo</a:t>
             </a:r>
           </a:p>
         </p:txBody>
@@ -6333,7 +10292,7 @@
                 </a:solidFill>
                 <a:latin typeface="Segoe UI"/>
               </a:rPr>
-              <a:t>Apoya el ticket en una superficie plana</a:t>
+              <a:t>Con el tractor, el semi y la fecha de salida</a:t>
             </a:r>
           </a:p>
         </p:txBody>
@@ -6416,7 +10375,7 @@
                 </a:solidFill>
                 <a:latin typeface="Segoe UI"/>
               </a:rPr>
-              <a:t>Que entre completo y se lea bien el TOTAL</a:t>
+              <a:t>Si dice TIEMPO REAL, salio del sistema de la empresa</a:t>
             </a:r>
           </a:p>
         </p:txBody>
@@ -6499,7 +10458,7 @@
                 </a:solidFill>
                 <a:latin typeface="Segoe UI"/>
               </a:rPr>
-              <a:t>Evita sombras, reflejos y fotos movidas</a:t>
+              <a:t>Toca Agregar gasto a este viaje</a:t>
             </a:r>
           </a:p>
         </p:txBody>
@@ -6525,7 +10484,7 @@
           </a:solidFill>
           <a:ln w="12700">
             <a:solidFill>
-              <a:srgbClr val="60A5FA"/>
+              <a:srgbClr val="FBBF24"/>
             </a:solidFill>
           </a:ln>
           <a:effectLst/>
@@ -6580,11 +10539,11 @@
             <a:r>
               <a:rPr sz="1400" b="1">
                 <a:solidFill>
-                  <a:srgbClr val="60A5FA"/>
-                </a:solidFill>
-                <a:latin typeface="Segoe UI"/>
-              </a:rPr>
-              <a:t>Una foto clara es la diferencia entre que salga bien o tener que corregir.</a:t>
+                  <a:srgbClr val="FBBF24"/>
+                </a:solidFill>
+                <a:latin typeface="Segoe UI"/>
+              </a:rPr>
+              <a:t>Se busca cruzando tu legajo con la patente: solo aparece tu viaje.</a:t>
             </a:r>
           </a:p>
         </p:txBody>
@@ -6637,7 +10596,7 @@
       </p:sp>
       <p:pic>
         <p:nvPicPr>
-          <p:cNvPr id="17" name="Picture 16" descr="03_foto.png"/>
+          <p:cNvPr id="17" name="Picture 16" descr="02_viaje.png"/>
           <p:cNvPicPr>
             <a:picLocks noChangeAspect="1"/>
           </p:cNvPicPr>
@@ -6755,7 +10714,7 @@
                 </a:solidFill>
                 <a:latin typeface="Segoe UI"/>
               </a:rPr>
-              <a:t>PASO 4</a:t>
+              <a:t>PASO 3</a:t>
             </a:r>
           </a:p>
         </p:txBody>
@@ -6794,7 +10753,7 @@
                 </a:solidFill>
                 <a:latin typeface="Segoe UI"/>
               </a:rPr>
-              <a:t>La IA completa los datos</a:t>
+              <a:t>Sacale la foto al ticket</a:t>
             </a:r>
           </a:p>
         </p:txBody>
@@ -6833,7 +10792,7 @@
                 </a:solidFill>
                 <a:latin typeface="Segoe UI"/>
               </a:rPr>
-              <a:t>En unos segundos el formulario se llena solo.</a:t>
+              <a:t>Este es el unico paso que realmente hacas vos.</a:t>
             </a:r>
           </a:p>
         </p:txBody>
@@ -6916,7 +10875,7 @@
                 </a:solidFill>
                 <a:latin typeface="Segoe UI"/>
               </a:rPr>
-              <a:t>Lee el importe, la fecha y el pais</a:t>
+              <a:t>Toca el boton de la camara</a:t>
             </a:r>
           </a:p>
         </p:txBody>
@@ -6999,7 +10958,7 @@
                 </a:solidFill>
                 <a:latin typeface="Segoe UI"/>
               </a:rPr>
-              <a:t>Reconoce el comercio y clasifica el gasto</a:t>
+              <a:t>Apoya el ticket en una superficie plana</a:t>
             </a:r>
           </a:p>
         </p:txBody>
@@ -7082,7 +11041,7 @@
                 </a:solidFill>
                 <a:latin typeface="Segoe UI"/>
               </a:rPr>
-              <a:t>Revisa que el importe sea el correcto</a:t>
+              <a:t>Que entre completo y se lea bien el TOTAL</a:t>
             </a:r>
           </a:p>
         </p:txBody>
@@ -7165,7 +11124,7 @@
                 </a:solidFill>
                 <a:latin typeface="Segoe UI"/>
               </a:rPr>
-              <a:t>Toca Guardar gasto</a:t>
+              <a:t>Evita sombras, reflejos y fotos movidas</a:t>
             </a:r>
           </a:p>
         </p:txBody>
@@ -7191,7 +11150,7 @@
           </a:solidFill>
           <a:ln w="12700">
             <a:solidFill>
-              <a:srgbClr val="FBBF24"/>
+              <a:srgbClr val="60A5FA"/>
             </a:solidFill>
           </a:ln>
           <a:effectLst/>
@@ -7246,11 +11205,11 @@
             <a:r>
               <a:rPr sz="1400" b="1">
                 <a:solidFill>
-                  <a:srgbClr val="FBBF24"/>
-                </a:solidFill>
-                <a:latin typeface="Segoe UI"/>
-              </a:rPr>
-              <a:t>Siempre revisa el importe antes de guardar. La IA se puede equivocar.</a:t>
+                  <a:srgbClr val="60A5FA"/>
+                </a:solidFill>
+                <a:latin typeface="Segoe UI"/>
+              </a:rPr>
+              <a:t>Una foto clara es la diferencia entre que salga bien o tener que corregir.</a:t>
             </a:r>
           </a:p>
         </p:txBody>
@@ -7303,7 +11262,7 @@
       </p:sp>
       <p:pic>
         <p:nvPicPr>
-          <p:cNvPr id="17" name="Picture 16" descr="04_resultado.png"/>
+          <p:cNvPr id="17" name="Picture 16" descr="03_foto.png"/>
           <p:cNvPicPr>
             <a:picLocks noChangeAspect="1"/>
           </p:cNvPicPr>
@@ -7421,7 +11380,7 @@
                 </a:solidFill>
                 <a:latin typeface="Segoe UI"/>
               </a:rPr>
-              <a:t>PASO 5</a:t>
+              <a:t>PASO 4</a:t>
             </a:r>
           </a:p>
         </p:txBody>
@@ -7460,7 +11419,7 @@
                 </a:solidFill>
                 <a:latin typeface="Segoe UI"/>
               </a:rPr>
-              <a:t>Consulta lo que cargaste</a:t>
+              <a:t>La IA completa los datos</a:t>
             </a:r>
           </a:p>
         </p:txBody>
@@ -7499,7 +11458,7 @@
                 </a:solidFill>
                 <a:latin typeface="Segoe UI"/>
               </a:rPr>
-              <a:t>En Rendicion ves todos los gastos de tu viaje.</a:t>
+              <a:t>En unos segundos quedan solo cuatro campos para revisar.</a:t>
             </a:r>
           </a:p>
         </p:txBody>
@@ -7582,7 +11541,7 @@
                 </a:solidFill>
                 <a:latin typeface="Segoe UI"/>
               </a:rPr>
-              <a:t>El total aparece separado por moneda</a:t>
+              <a:t>Lee el importe, la fecha y el pais</a:t>
             </a:r>
           </a:p>
         </p:txBody>
@@ -7665,7 +11624,7 @@
                 </a:solidFill>
                 <a:latin typeface="Segoe UI"/>
               </a:rPr>
-              <a:t>Los pesos argentinos no se mezclan con los chilenos</a:t>
+              <a:t>Reconoce el comercio y clasifica el gasto</a:t>
             </a:r>
           </a:p>
         </p:txBody>
@@ -7748,7 +11707,7 @@
                 </a:solidFill>
                 <a:latin typeface="Segoe UI"/>
               </a:rPr>
-              <a:t>Podes entrar al viaje y ver gasto por gasto</a:t>
+              <a:t>Revisa que el importe sea el correcto</a:t>
             </a:r>
           </a:p>
         </p:txBody>
@@ -7831,7 +11790,7 @@
                 </a:solidFill>
                 <a:latin typeface="Segoe UI"/>
               </a:rPr>
-              <a:t>Si cargaste uno mal, lo podes borrar</a:t>
+              <a:t>Toca Guardar gasto</a:t>
             </a:r>
           </a:p>
         </p:txBody>
@@ -7857,7 +11816,7 @@
           </a:solidFill>
           <a:ln w="12700">
             <a:solidFill>
-              <a:srgbClr val="60A5FA"/>
+              <a:srgbClr val="FBBF24"/>
             </a:solidFill>
           </a:ln>
           <a:effectLst/>
@@ -7912,11 +11871,11 @@
             <a:r>
               <a:rPr sz="1400" b="1">
                 <a:solidFill>
-                  <a:srgbClr val="60A5FA"/>
-                </a:solidFill>
-                <a:latin typeface="Segoe UI"/>
-              </a:rPr>
-              <a:t>Cada moneda lleva su propio total. No se suman entre si.</a:t>
+                  <a:srgbClr val="FBBF24"/>
+                </a:solidFill>
+                <a:latin typeface="Segoe UI"/>
+              </a:rPr>
+              <a:t>Solo ves Fecha, Pais, Importe y Descripcion. Lo demas lo resuelve el sistema.</a:t>
             </a:r>
           </a:p>
         </p:txBody>
@@ -7969,7 +11928,7 @@
       </p:sp>
       <p:pic>
         <p:nvPicPr>
-          <p:cNvPr id="17" name="Picture 16" descr="05_rendicion.png"/>
+          <p:cNvPr id="17" name="Picture 16" descr="04_resultado.png"/>
           <p:cNvPicPr>
             <a:picLocks noChangeAspect="1"/>
           </p:cNvPicPr>
@@ -8055,16 +12014,133 @@
       </p:sp>
       <p:sp>
         <p:nvSpPr>
-          <p:cNvPr id="3" name="Rectangle 2"/>
+          <p:cNvPr id="3" name="TextBox 2"/>
+          <p:cNvSpPr txBox="1"/>
+          <p:nvPr/>
+        </p:nvSpPr>
+        <p:spPr>
+          <a:xfrm>
+            <a:off x="822960" y="658368"/>
+            <a:ext cx="5486400" cy="365760"/>
+          </a:xfrm>
+          <a:prstGeom prst="rect">
+            <a:avLst/>
+          </a:prstGeom>
+          <a:noFill/>
+        </p:spPr>
+        <p:txBody>
+          <a:bodyPr wrap="square" anchor="t" lIns="0" rIns="0" tIns="0" bIns="0">
+            <a:spAutoFit/>
+          </a:bodyPr>
+          <a:lstStyle/>
+          <a:p>
+            <a:pPr algn="l">
+              <a:lnSpc>
+                <a:spcPct val="115000"/>
+              </a:lnSpc>
+            </a:pPr>
+            <a:r>
+              <a:rPr sz="1400" b="1">
+                <a:solidFill>
+                  <a:srgbClr val="34D399"/>
+                </a:solidFill>
+                <a:latin typeface="Segoe UI"/>
+              </a:rPr>
+              <a:t>PASO 5</a:t>
+            </a:r>
+          </a:p>
+        </p:txBody>
+      </p:sp>
+      <p:sp>
+        <p:nvSpPr>
+          <p:cNvPr id="4" name="TextBox 3"/>
+          <p:cNvSpPr txBox="1"/>
+          <p:nvPr/>
+        </p:nvSpPr>
+        <p:spPr>
+          <a:xfrm>
+            <a:off x="822960" y="1051560"/>
+            <a:ext cx="6766560" cy="777240"/>
+          </a:xfrm>
+          <a:prstGeom prst="rect">
+            <a:avLst/>
+          </a:prstGeom>
+          <a:noFill/>
+        </p:spPr>
+        <p:txBody>
+          <a:bodyPr wrap="square" anchor="t" lIns="0" rIns="0" tIns="0" bIns="0">
+            <a:spAutoFit/>
+          </a:bodyPr>
+          <a:lstStyle/>
+          <a:p>
+            <a:pPr algn="l">
+              <a:lnSpc>
+                <a:spcPct val="115000"/>
+              </a:lnSpc>
+            </a:pPr>
+            <a:r>
+              <a:rPr sz="3800" b="1">
+                <a:solidFill>
+                  <a:srgbClr val="FFFFFF"/>
+                </a:solidFill>
+                <a:latin typeface="Segoe UI"/>
+              </a:rPr>
+              <a:t>Consulta tu rendicion</a:t>
+            </a:r>
+          </a:p>
+        </p:txBody>
+      </p:sp>
+      <p:sp>
+        <p:nvSpPr>
+          <p:cNvPr id="5" name="TextBox 4"/>
+          <p:cNvSpPr txBox="1"/>
+          <p:nvPr/>
+        </p:nvSpPr>
+        <p:spPr>
+          <a:xfrm>
+            <a:off x="822960" y="1874519"/>
+            <a:ext cx="6583680" cy="502920"/>
+          </a:xfrm>
+          <a:prstGeom prst="rect">
+            <a:avLst/>
+          </a:prstGeom>
+          <a:noFill/>
+        </p:spPr>
+        <p:txBody>
+          <a:bodyPr wrap="square" anchor="t" lIns="0" rIns="0" tIns="0" bIns="0">
+            <a:spAutoFit/>
+          </a:bodyPr>
+          <a:lstStyle/>
+          <a:p>
+            <a:pPr algn="l">
+              <a:lnSpc>
+                <a:spcPct val="125000"/>
+              </a:lnSpc>
+            </a:pPr>
+            <a:r>
+              <a:rPr sz="1800" b="0">
+                <a:solidFill>
+                  <a:srgbClr val="9CA3AF"/>
+                </a:solidFill>
+                <a:latin typeface="Segoe UI"/>
+              </a:rPr>
+              <a:t>Solo el viaje en curso, con un total por cada moneda.</a:t>
+            </a:r>
+          </a:p>
+        </p:txBody>
+      </p:sp>
+      <p:sp>
+        <p:nvSpPr>
+          <p:cNvPr id="6" name="Oval 5"/>
           <p:cNvSpPr/>
           <p:nvPr/>
         </p:nvSpPr>
         <p:spPr>
           <a:xfrm>
-            <a:off x="0" y="0"/>
-            <a:ext cx="100584" cy="6858000"/>
-          </a:xfrm>
-          <a:prstGeom prst="rect">
+            <a:off x="868680" y="2807208"/>
+            <a:ext cx="118872" cy="118872"/>
+          </a:xfrm>
+          <a:prstGeom prst="ellipse">
             <a:avLst/>
           </a:prstGeom>
           <a:solidFill>
@@ -8092,19 +12168,355 @@
         <p:txBody>
           <a:bodyPr rtlCol="0" anchor="ctr"/>
           <a:lstStyle/>
+          <a:p>
+            <a:pPr algn="ctr"/>
+          </a:p>
+        </p:txBody>
+      </p:sp>
+      <p:sp>
+        <p:nvSpPr>
+          <p:cNvPr id="7" name="TextBox 6"/>
+          <p:cNvSpPr txBox="1"/>
+          <p:nvPr/>
+        </p:nvSpPr>
+        <p:spPr>
+          <a:xfrm>
+            <a:off x="1234440" y="2697480"/>
+            <a:ext cx="6035040" cy="548640"/>
+          </a:xfrm>
+          <a:prstGeom prst="rect">
+            <a:avLst/>
+          </a:prstGeom>
+          <a:noFill/>
+        </p:spPr>
+        <p:txBody>
+          <a:bodyPr wrap="square" anchor="t" lIns="0" rIns="0" tIns="0" bIns="0">
+            <a:spAutoFit/>
+          </a:bodyPr>
+          <a:lstStyle/>
+          <a:p>
+            <a:pPr algn="l">
+              <a:lnSpc>
+                <a:spcPct val="130000"/>
+              </a:lnSpc>
+            </a:pPr>
+            <a:r>
+              <a:rPr sz="1600" b="0">
+                <a:solidFill>
+                  <a:srgbClr val="9CA3AF"/>
+                </a:solidFill>
+                <a:latin typeface="Segoe UI"/>
+              </a:rPr>
+              <a:t>Se muestra unicamente la hoja de ruta en uso</a:t>
+            </a:r>
+          </a:p>
+        </p:txBody>
+      </p:sp>
+      <p:sp>
+        <p:nvSpPr>
+          <p:cNvPr id="8" name="Oval 7"/>
+          <p:cNvSpPr/>
+          <p:nvPr/>
+        </p:nvSpPr>
+        <p:spPr>
+          <a:xfrm>
+            <a:off x="868680" y="3465576"/>
+            <a:ext cx="118872" cy="118872"/>
+          </a:xfrm>
+          <a:prstGeom prst="ellipse">
+            <a:avLst/>
+          </a:prstGeom>
+          <a:solidFill>
+            <a:srgbClr val="34D399"/>
+          </a:solidFill>
+          <a:ln>
+            <a:noFill/>
+          </a:ln>
+          <a:effectLst/>
+        </p:spPr>
+        <p:style>
+          <a:lnRef idx="1">
+            <a:schemeClr val="accent1"/>
+          </a:lnRef>
+          <a:fillRef idx="3">
+            <a:schemeClr val="accent1"/>
+          </a:fillRef>
+          <a:effectRef idx="2">
+            <a:schemeClr val="accent1"/>
+          </a:effectRef>
+          <a:fontRef idx="minor">
+            <a:schemeClr val="lt1"/>
+          </a:fontRef>
+        </p:style>
+        <p:txBody>
+          <a:bodyPr rtlCol="0" anchor="ctr"/>
+          <a:lstStyle/>
+          <a:p>
+            <a:pPr algn="ctr"/>
+          </a:p>
+        </p:txBody>
+      </p:sp>
+      <p:sp>
+        <p:nvSpPr>
+          <p:cNvPr id="9" name="TextBox 8"/>
+          <p:cNvSpPr txBox="1"/>
+          <p:nvPr/>
+        </p:nvSpPr>
+        <p:spPr>
+          <a:xfrm>
+            <a:off x="1234440" y="3355848"/>
+            <a:ext cx="6035040" cy="548640"/>
+          </a:xfrm>
+          <a:prstGeom prst="rect">
+            <a:avLst/>
+          </a:prstGeom>
+          <a:noFill/>
+        </p:spPr>
+        <p:txBody>
+          <a:bodyPr wrap="square" anchor="t" lIns="0" rIns="0" tIns="0" bIns="0">
+            <a:spAutoFit/>
+          </a:bodyPr>
+          <a:lstStyle/>
+          <a:p>
+            <a:pPr algn="l">
+              <a:lnSpc>
+                <a:spcPct val="130000"/>
+              </a:lnSpc>
+            </a:pPr>
+            <a:r>
+              <a:rPr sz="1600" b="0">
+                <a:solidFill>
+                  <a:srgbClr val="9CA3AF"/>
+                </a:solidFill>
+                <a:latin typeface="Segoe UI"/>
+              </a:rPr>
+              <a:t>Los pesos argentinos y los chilenos van separados</a:t>
+            </a:r>
+          </a:p>
+        </p:txBody>
+      </p:sp>
+      <p:sp>
+        <p:nvSpPr>
+          <p:cNvPr id="10" name="Oval 9"/>
+          <p:cNvSpPr/>
+          <p:nvPr/>
+        </p:nvSpPr>
+        <p:spPr>
+          <a:xfrm>
+            <a:off x="868680" y="4123944"/>
+            <a:ext cx="118872" cy="118872"/>
+          </a:xfrm>
+          <a:prstGeom prst="ellipse">
+            <a:avLst/>
+          </a:prstGeom>
+          <a:solidFill>
+            <a:srgbClr val="34D399"/>
+          </a:solidFill>
+          <a:ln>
+            <a:noFill/>
+          </a:ln>
+          <a:effectLst/>
+        </p:spPr>
+        <p:style>
+          <a:lnRef idx="1">
+            <a:schemeClr val="accent1"/>
+          </a:lnRef>
+          <a:fillRef idx="3">
+            <a:schemeClr val="accent1"/>
+          </a:fillRef>
+          <a:effectRef idx="2">
+            <a:schemeClr val="accent1"/>
+          </a:effectRef>
+          <a:fontRef idx="minor">
+            <a:schemeClr val="lt1"/>
+          </a:fontRef>
+        </p:style>
+        <p:txBody>
+          <a:bodyPr rtlCol="0" anchor="ctr"/>
+          <a:lstStyle/>
+          <a:p>
+            <a:pPr algn="ctr"/>
+          </a:p>
+        </p:txBody>
+      </p:sp>
+      <p:sp>
+        <p:nvSpPr>
+          <p:cNvPr id="11" name="TextBox 10"/>
+          <p:cNvSpPr txBox="1"/>
+          <p:nvPr/>
+        </p:nvSpPr>
+        <p:spPr>
+          <a:xfrm>
+            <a:off x="1234440" y="4014216"/>
+            <a:ext cx="6035040" cy="548640"/>
+          </a:xfrm>
+          <a:prstGeom prst="rect">
+            <a:avLst/>
+          </a:prstGeom>
+          <a:noFill/>
+        </p:spPr>
+        <p:txBody>
+          <a:bodyPr wrap="square" anchor="t" lIns="0" rIns="0" tIns="0" bIns="0">
+            <a:spAutoFit/>
+          </a:bodyPr>
+          <a:lstStyle/>
+          <a:p>
+            <a:pPr algn="l">
+              <a:lnSpc>
+                <a:spcPct val="130000"/>
+              </a:lnSpc>
+            </a:pPr>
+            <a:r>
+              <a:rPr sz="1600" b="0">
+                <a:solidFill>
+                  <a:srgbClr val="9CA3AF"/>
+                </a:solidFill>
+                <a:latin typeface="Segoe UI"/>
+              </a:rPr>
+              <a:t>Ver detalle lista los gastos uno por uno</a:t>
+            </a:r>
+          </a:p>
+        </p:txBody>
+      </p:sp>
+      <p:sp>
+        <p:nvSpPr>
+          <p:cNvPr id="12" name="Oval 11"/>
+          <p:cNvSpPr/>
+          <p:nvPr/>
+        </p:nvSpPr>
+        <p:spPr>
+          <a:xfrm>
+            <a:off x="868680" y="4782312"/>
+            <a:ext cx="118872" cy="118872"/>
+          </a:xfrm>
+          <a:prstGeom prst="ellipse">
+            <a:avLst/>
+          </a:prstGeom>
+          <a:solidFill>
+            <a:srgbClr val="34D399"/>
+          </a:solidFill>
+          <a:ln>
+            <a:noFill/>
+          </a:ln>
+          <a:effectLst/>
+        </p:spPr>
+        <p:style>
+          <a:lnRef idx="1">
+            <a:schemeClr val="accent1"/>
+          </a:lnRef>
+          <a:fillRef idx="3">
+            <a:schemeClr val="accent1"/>
+          </a:fillRef>
+          <a:effectRef idx="2">
+            <a:schemeClr val="accent1"/>
+          </a:effectRef>
+          <a:fontRef idx="minor">
+            <a:schemeClr val="lt1"/>
+          </a:fontRef>
+        </p:style>
+        <p:txBody>
+          <a:bodyPr rtlCol="0" anchor="ctr"/>
+          <a:lstStyle/>
+          <a:p>
+            <a:pPr algn="ctr"/>
+          </a:p>
+        </p:txBody>
+      </p:sp>
+      <p:sp>
+        <p:nvSpPr>
+          <p:cNvPr id="13" name="TextBox 12"/>
+          <p:cNvSpPr txBox="1"/>
+          <p:nvPr/>
+        </p:nvSpPr>
+        <p:spPr>
+          <a:xfrm>
+            <a:off x="1234440" y="4672584"/>
+            <a:ext cx="6035040" cy="548640"/>
+          </a:xfrm>
+          <a:prstGeom prst="rect">
+            <a:avLst/>
+          </a:prstGeom>
+          <a:noFill/>
+        </p:spPr>
+        <p:txBody>
+          <a:bodyPr wrap="square" anchor="t" lIns="0" rIns="0" tIns="0" bIns="0">
+            <a:spAutoFit/>
+          </a:bodyPr>
+          <a:lstStyle/>
+          <a:p>
+            <a:pPr algn="l">
+              <a:lnSpc>
+                <a:spcPct val="130000"/>
+              </a:lnSpc>
+            </a:pPr>
+            <a:r>
+              <a:rPr sz="1600" b="0">
+                <a:solidFill>
+                  <a:srgbClr val="9CA3AF"/>
+                </a:solidFill>
+                <a:latin typeface="Segoe UI"/>
+              </a:rPr>
+              <a:t>Los gastos no se borran desde el celular</a:t>
+            </a:r>
+          </a:p>
+        </p:txBody>
+      </p:sp>
+      <p:sp>
+        <p:nvSpPr>
+          <p:cNvPr id="14" name="Rounded Rectangle 13"/>
+          <p:cNvSpPr/>
+          <p:nvPr/>
+        </p:nvSpPr>
+        <p:spPr>
+          <a:xfrm>
+            <a:off x="822960" y="5257800"/>
+            <a:ext cx="6675120" cy="841248"/>
+          </a:xfrm>
+          <a:prstGeom prst="roundRect">
+            <a:avLst>
+              <a:gd name="adj" fmla="val 6000"/>
+            </a:avLst>
+          </a:prstGeom>
+          <a:solidFill>
+            <a:srgbClr val="161A22"/>
+          </a:solidFill>
+          <a:ln w="12700">
+            <a:solidFill>
+              <a:srgbClr val="60A5FA"/>
+            </a:solidFill>
+          </a:ln>
+          <a:effectLst/>
+        </p:spPr>
+        <p:style>
+          <a:lnRef idx="1">
+            <a:schemeClr val="accent1"/>
+          </a:lnRef>
+          <a:fillRef idx="3">
+            <a:schemeClr val="accent1"/>
+          </a:fillRef>
+          <a:effectRef idx="2">
+            <a:schemeClr val="accent1"/>
+          </a:effectRef>
+          <a:fontRef idx="minor">
+            <a:schemeClr val="lt1"/>
+          </a:fontRef>
+        </p:style>
+        <p:txBody>
+          <a:bodyPr rtlCol="0" anchor="ctr"/>
+          <a:lstStyle/>
           <a:p/>
         </p:txBody>
       </p:sp>
       <p:sp>
         <p:nvSpPr>
-          <p:cNvPr id="4" name="TextBox 3"/>
+          <p:cNvPr id="15" name="TextBox 14"/>
           <p:cNvSpPr txBox="1"/>
           <p:nvPr/>
         </p:nvSpPr>
         <p:spPr>
           <a:xfrm>
-            <a:off x="822960" y="1234440"/>
-            <a:ext cx="6400800" cy="365760"/>
+            <a:off x="1143000" y="5504688"/>
+            <a:ext cx="6126480" cy="457200"/>
           </a:xfrm>
           <a:prstGeom prst="rect">
             <a:avLst/>
@@ -8123,27 +12535,201 @@
               </a:lnSpc>
             </a:pPr>
             <a:r>
-              <a:rPr sz="1500" b="1">
-                <a:solidFill>
-                  <a:srgbClr val="34D399"/>
-                </a:solidFill>
-                <a:latin typeface="Segoe UI"/>
-              </a:rPr>
-              <a:t>A PROBARLA</a:t>
-            </a:r>
-          </a:p>
-        </p:txBody>
-      </p:sp>
-      <p:sp>
-        <p:nvSpPr>
-          <p:cNvPr id="5" name="TextBox 4"/>
+              <a:rPr sz="1400" b="1">
+                <a:solidFill>
+                  <a:srgbClr val="60A5FA"/>
+                </a:solidFill>
+                <a:latin typeface="Segoe UI"/>
+              </a:rPr>
+              <a:t>Cada moneda lleva su propio total. Nunca se suman entre si.</a:t>
+            </a:r>
+          </a:p>
+        </p:txBody>
+      </p:sp>
+      <p:sp>
+        <p:nvSpPr>
+          <p:cNvPr id="16" name="Rounded Rectangle 15"/>
+          <p:cNvSpPr/>
+          <p:nvPr/>
+        </p:nvSpPr>
+        <p:spPr>
+          <a:xfrm>
+            <a:off x="8613648" y="566928"/>
+            <a:ext cx="2788920" cy="5724144"/>
+          </a:xfrm>
+          <a:prstGeom prst="roundRect">
+            <a:avLst>
+              <a:gd name="adj" fmla="val 6000"/>
+            </a:avLst>
+          </a:prstGeom>
+          <a:solidFill>
+            <a:srgbClr val="0A0C10"/>
+          </a:solidFill>
+          <a:ln w="12700">
+            <a:solidFill>
+              <a:srgbClr val="2E3442"/>
+            </a:solidFill>
+          </a:ln>
+          <a:effectLst/>
+        </p:spPr>
+        <p:style>
+          <a:lnRef idx="1">
+            <a:schemeClr val="accent1"/>
+          </a:lnRef>
+          <a:fillRef idx="3">
+            <a:schemeClr val="accent1"/>
+          </a:fillRef>
+          <a:effectRef idx="2">
+            <a:schemeClr val="accent1"/>
+          </a:effectRef>
+          <a:fontRef idx="minor">
+            <a:schemeClr val="lt1"/>
+          </a:fontRef>
+        </p:style>
+        <p:txBody>
+          <a:bodyPr rtlCol="0" anchor="ctr"/>
+          <a:lstStyle/>
+          <a:p/>
+        </p:txBody>
+      </p:sp>
+      <p:pic>
+        <p:nvPicPr>
+          <p:cNvPr id="17" name="Picture 16" descr="05_rendicion.png"/>
+          <p:cNvPicPr>
+            <a:picLocks noChangeAspect="1"/>
+          </p:cNvPicPr>
+          <p:nvPr/>
+        </p:nvPicPr>
+        <p:blipFill>
+          <a:blip r:embed="rId2"/>
+          <a:stretch>
+            <a:fillRect/>
+          </a:stretch>
+        </p:blipFill>
+        <p:spPr>
+          <a:xfrm>
+            <a:off x="8732520" y="685800"/>
+            <a:ext cx="2551176" cy="5486400"/>
+          </a:xfrm>
+          <a:prstGeom prst="rect">
+            <a:avLst/>
+          </a:prstGeom>
+        </p:spPr>
+      </p:pic>
+    </p:spTree>
+  </p:cSld>
+  <p:clrMapOvr>
+    <a:masterClrMapping/>
+  </p:clrMapOvr>
+</p:sld>
+</file>
+
+<file path=ppt/slides/slide9.xml><?xml version="1.0" encoding="utf-8"?>
+<p:sld xmlns:a="http://schemas.openxmlformats.org/drawingml/2006/main" xmlns:p="http://schemas.openxmlformats.org/presentationml/2006/main" xmlns:r="http://schemas.openxmlformats.org/officeDocument/2006/relationships">
+  <p:cSld>
+    <p:spTree>
+      <p:nvGrpSpPr>
+        <p:cNvPr id="1" name=""/>
+        <p:cNvGrpSpPr/>
+        <p:nvPr/>
+      </p:nvGrpSpPr>
+      <p:grpSpPr/>
+      <p:sp>
+        <p:nvSpPr>
+          <p:cNvPr id="2" name="Rectangle 1"/>
+          <p:cNvSpPr/>
+          <p:nvPr/>
+        </p:nvSpPr>
+        <p:spPr>
+          <a:xfrm>
+            <a:off x="0" y="0"/>
+            <a:ext cx="12191695" cy="6858000"/>
+          </a:xfrm>
+          <a:prstGeom prst="rect">
+            <a:avLst/>
+          </a:prstGeom>
+          <a:solidFill>
+            <a:srgbClr val="0F1117"/>
+          </a:solidFill>
+          <a:ln>
+            <a:noFill/>
+          </a:ln>
+          <a:effectLst/>
+        </p:spPr>
+        <p:style>
+          <a:lnRef idx="1">
+            <a:schemeClr val="accent1"/>
+          </a:lnRef>
+          <a:fillRef idx="3">
+            <a:schemeClr val="accent1"/>
+          </a:fillRef>
+          <a:effectRef idx="2">
+            <a:schemeClr val="accent1"/>
+          </a:effectRef>
+          <a:fontRef idx="minor">
+            <a:schemeClr val="lt1"/>
+          </a:fontRef>
+        </p:style>
+        <p:txBody>
+          <a:bodyPr rtlCol="0" anchor="ctr"/>
+          <a:lstStyle/>
+          <a:p>
+            <a:pPr algn="ctr"/>
+          </a:p>
+        </p:txBody>
+      </p:sp>
+      <p:sp>
+        <p:nvSpPr>
+          <p:cNvPr id="3" name="Rectangle 2"/>
+          <p:cNvSpPr/>
+          <p:nvPr/>
+        </p:nvSpPr>
+        <p:spPr>
+          <a:xfrm>
+            <a:off x="0" y="0"/>
+            <a:ext cx="100584" cy="6858000"/>
+          </a:xfrm>
+          <a:prstGeom prst="rect">
+            <a:avLst/>
+          </a:prstGeom>
+          <a:solidFill>
+            <a:srgbClr val="34D399"/>
+          </a:solidFill>
+          <a:ln>
+            <a:noFill/>
+          </a:ln>
+          <a:effectLst/>
+        </p:spPr>
+        <p:style>
+          <a:lnRef idx="1">
+            <a:schemeClr val="accent1"/>
+          </a:lnRef>
+          <a:fillRef idx="3">
+            <a:schemeClr val="accent1"/>
+          </a:fillRef>
+          <a:effectRef idx="2">
+            <a:schemeClr val="accent1"/>
+          </a:effectRef>
+          <a:fontRef idx="minor">
+            <a:schemeClr val="lt1"/>
+          </a:fontRef>
+        </p:style>
+        <p:txBody>
+          <a:bodyPr rtlCol="0" anchor="ctr"/>
+          <a:lstStyle/>
+          <a:p/>
+        </p:txBody>
+      </p:sp>
+      <p:sp>
+        <p:nvSpPr>
+          <p:cNvPr id="4" name="TextBox 3"/>
           <p:cNvSpPr txBox="1"/>
           <p:nvPr/>
         </p:nvSpPr>
         <p:spPr>
           <a:xfrm>
-            <a:off x="822960" y="1691640"/>
-            <a:ext cx="6949440" cy="1371600"/>
+            <a:off x="1005840" y="1828800"/>
+            <a:ext cx="2743200" cy="1280160"/>
           </a:xfrm>
           <a:prstGeom prst="rect">
             <a:avLst/>
@@ -8162,27 +12748,27 @@
               </a:lnSpc>
             </a:pPr>
             <a:r>
-              <a:rPr sz="4800" b="1">
-                <a:solidFill>
-                  <a:srgbClr val="FFFFFF"/>
-                </a:solidFill>
-                <a:latin typeface="Segoe UI"/>
-              </a:rPr>
-              <a:t>Entra desde tu celular</a:t>
-            </a:r>
-          </a:p>
-        </p:txBody>
-      </p:sp>
-      <p:sp>
-        <p:nvSpPr>
-          <p:cNvPr id="6" name="TextBox 5"/>
+              <a:rPr sz="9600" b="1">
+                <a:solidFill>
+                  <a:srgbClr val="103C30"/>
+                </a:solidFill>
+                <a:latin typeface="Segoe UI"/>
+              </a:rPr>
+              <a:t>2</a:t>
+            </a:r>
+          </a:p>
+        </p:txBody>
+      </p:sp>
+      <p:sp>
+        <p:nvSpPr>
+          <p:cNvPr id="5" name="TextBox 4"/>
           <p:cNvSpPr txBox="1"/>
           <p:nvPr/>
         </p:nvSpPr>
         <p:spPr>
           <a:xfrm>
-            <a:off x="822960" y="2880360"/>
-            <a:ext cx="6583680" cy="1005840"/>
+            <a:off x="1005840" y="2148840"/>
+            <a:ext cx="6400800" cy="457200"/>
           </a:xfrm>
           <a:prstGeom prst="rect">
             <a:avLst/>
@@ -8197,33 +12783,56 @@
           <a:p>
             <a:pPr algn="l">
               <a:lnSpc>
-                <a:spcPct val="135000"/>
+                <a:spcPct val="115000"/>
               </a:lnSpc>
             </a:pPr>
             <a:r>
-              <a:rPr sz="1900" b="0">
-                <a:solidFill>
-                  <a:srgbClr val="9CA3AF"/>
-                </a:solidFill>
-                <a:latin typeface="Segoe UI"/>
-              </a:rPr>
-              <a:t>Escanea el codigo con la camara del telefono.</a:t>
-            </a:r>
-          </a:p>
+              <a:rPr sz="1500" b="1">
+                <a:solidFill>
+                  <a:srgbClr val="34D399"/>
+                </a:solidFill>
+                <a:latin typeface="Segoe UI"/>
+              </a:rPr>
+              <a:t>SEGUNDA PARTE</a:t>
+            </a:r>
+          </a:p>
+        </p:txBody>
+      </p:sp>
+      <p:sp>
+        <p:nvSpPr>
+          <p:cNvPr id="6" name="TextBox 5"/>
+          <p:cNvSpPr txBox="1"/>
+          <p:nvPr/>
+        </p:nvSpPr>
+        <p:spPr>
+          <a:xfrm>
+            <a:off x="1005840" y="2606040"/>
+            <a:ext cx="7315200" cy="1097280"/>
+          </a:xfrm>
+          <a:prstGeom prst="rect">
+            <a:avLst/>
+          </a:prstGeom>
+          <a:noFill/>
+        </p:spPr>
+        <p:txBody>
+          <a:bodyPr wrap="square" anchor="t" lIns="0" rIns="0" tIns="0" bIns="0">
+            <a:spAutoFit/>
+          </a:bodyPr>
+          <a:lstStyle/>
           <a:p>
             <a:pPr algn="l">
               <a:lnSpc>
-                <a:spcPct val="135000"/>
+                <a:spcPct val="115000"/>
               </a:lnSpc>
             </a:pPr>
             <a:r>
-              <a:rPr sz="1900" b="0">
-                <a:solidFill>
-                  <a:srgbClr val="9CA3AF"/>
-                </a:solidFill>
-                <a:latin typeface="Segoe UI"/>
-              </a:rPr>
-              <a:t>No hay que instalar ninguna aplicacion.</a:t>
+              <a:rPr sz="4400" b="1">
+                <a:solidFill>
+                  <a:srgbClr val="FFFFFF"/>
+                </a:solidFill>
+                <a:latin typeface="Segoe UI"/>
+              </a:rPr>
+              <a:t>Administracion</a:t>
             </a:r>
           </a:p>
         </p:txBody>
@@ -8236,14 +12845,14 @@
         </p:nvSpPr>
         <p:spPr>
           <a:xfrm>
-            <a:off x="868680" y="4123944"/>
-            <a:ext cx="109728" cy="109728"/>
+            <a:off x="1051560" y="4279392"/>
+            <a:ext cx="118872" cy="118872"/>
           </a:xfrm>
           <a:prstGeom prst="ellipse">
             <a:avLst/>
           </a:prstGeom>
           <a:solidFill>
-            <a:srgbClr val="FBBF24"/>
+            <a:srgbClr val="34D399"/>
           </a:solidFill>
           <a:ln>
             <a:noFill/>
@@ -8280,8 +12889,8 @@
         </p:nvSpPr>
         <p:spPr>
           <a:xfrm>
-            <a:off x="1207008" y="4023360"/>
-            <a:ext cx="6035040" cy="457200"/>
+            <a:off x="1417320" y="4160520"/>
+            <a:ext cx="6766560" cy="457200"/>
           </a:xfrm>
           <a:prstGeom prst="rect">
             <a:avLst/>
@@ -8300,13 +12909,13 @@
               </a:lnSpc>
             </a:pPr>
             <a:r>
-              <a:rPr sz="1500" b="0">
+              <a:rPr sz="1600" b="0">
                 <a:solidFill>
                   <a:srgbClr val="9CA3AF"/>
                 </a:solidFill>
                 <a:latin typeface="Segoe UI"/>
               </a:rPr>
-              <a:t>Cargá el gasto en el momento, no lo dejes para despues</a:t>
+              <a:t>Revisa las rendiciones que cargaron los choferes</a:t>
             </a:r>
           </a:p>
         </p:txBody>
@@ -8319,14 +12928,14 @@
         </p:nvSpPr>
         <p:spPr>
           <a:xfrm>
-            <a:off x="868680" y="4672584"/>
-            <a:ext cx="109728" cy="109728"/>
+            <a:off x="1051560" y="4846320"/>
+            <a:ext cx="118872" cy="118872"/>
           </a:xfrm>
           <a:prstGeom prst="ellipse">
             <a:avLst/>
           </a:prstGeom>
           <a:solidFill>
-            <a:srgbClr val="FBBF24"/>
+            <a:srgbClr val="34D399"/>
           </a:solidFill>
           <a:ln>
             <a:noFill/>
@@ -8363,8 +12972,8 @@
         </p:nvSpPr>
         <p:spPr>
           <a:xfrm>
-            <a:off x="1207008" y="4572000"/>
-            <a:ext cx="6035040" cy="457200"/>
+            <a:off x="1417320" y="4727448"/>
+            <a:ext cx="6766560" cy="457200"/>
           </a:xfrm>
           <a:prstGeom prst="rect">
             <a:avLst/>
@@ -8383,13 +12992,13 @@
               </a:lnSpc>
             </a:pPr>
             <a:r>
-              <a:rPr sz="1500" b="0">
+              <a:rPr sz="1600" b="0">
                 <a:solidFill>
                   <a:srgbClr val="9CA3AF"/>
                 </a:solidFill>
                 <a:latin typeface="Segoe UI"/>
               </a:rPr>
-              <a:t>Que el ticket entre completo en la foto</a:t>
+              <a:t>Corrige los datos que la IA pudo leer mal</a:t>
             </a:r>
           </a:p>
         </p:txBody>
@@ -8402,14 +13011,14 @@
         </p:nvSpPr>
         <p:spPr>
           <a:xfrm>
-            <a:off x="868680" y="5221224"/>
-            <a:ext cx="109728" cy="109728"/>
+            <a:off x="1051560" y="5413248"/>
+            <a:ext cx="118872" cy="118872"/>
           </a:xfrm>
           <a:prstGeom prst="ellipse">
             <a:avLst/>
           </a:prstGeom>
           <a:solidFill>
-            <a:srgbClr val="FBBF24"/>
+            <a:srgbClr val="34D399"/>
           </a:solidFill>
           <a:ln>
             <a:noFill/>
@@ -8446,8 +13055,8 @@
         </p:nvSpPr>
         <p:spPr>
           <a:xfrm>
-            <a:off x="1207008" y="5120640"/>
-            <a:ext cx="6035040" cy="457200"/>
+            <a:off x="1417320" y="5294376"/>
+            <a:ext cx="6766560" cy="457200"/>
           </a:xfrm>
           <a:prstGeom prst="rect">
             <a:avLst/>
@@ -8466,20 +13075,103 @@
               </a:lnSpc>
             </a:pPr>
             <a:r>
-              <a:rPr sz="1500" b="0">
+              <a:rPr sz="1600" b="0">
                 <a:solidFill>
                   <a:srgbClr val="9CA3AF"/>
                 </a:solidFill>
                 <a:latin typeface="Segoe UI"/>
               </a:rPr>
-              <a:t>Si el importe salio mal, corregilo antes de guardar</a:t>
-            </a:r>
-          </a:p>
-        </p:txBody>
-      </p:sp>
-      <p:sp>
-        <p:nvSpPr>
-          <p:cNvPr id="13" name="Rounded Rectangle 12"/>
+              <a:t>Aprueba la rendicion cuando esta controlada</a:t>
+            </a:r>
+          </a:p>
+        </p:txBody>
+      </p:sp>
+      <p:sp>
+        <p:nvSpPr>
+          <p:cNvPr id="13" name="Oval 12"/>
+          <p:cNvSpPr/>
+          <p:nvPr/>
+        </p:nvSpPr>
+        <p:spPr>
+          <a:xfrm>
+            <a:off x="1051560" y="5980176"/>
+            <a:ext cx="118872" cy="118872"/>
+          </a:xfrm>
+          <a:prstGeom prst="ellipse">
+            <a:avLst/>
+          </a:prstGeom>
+          <a:solidFill>
+            <a:srgbClr val="34D399"/>
+          </a:solidFill>
+          <a:ln>
+            <a:noFill/>
+          </a:ln>
+          <a:effectLst/>
+        </p:spPr>
+        <p:style>
+          <a:lnRef idx="1">
+            <a:schemeClr val="accent1"/>
+          </a:lnRef>
+          <a:fillRef idx="3">
+            <a:schemeClr val="accent1"/>
+          </a:fillRef>
+          <a:effectRef idx="2">
+            <a:schemeClr val="accent1"/>
+          </a:effectRef>
+          <a:fontRef idx="minor">
+            <a:schemeClr val="lt1"/>
+          </a:fontRef>
+        </p:style>
+        <p:txBody>
+          <a:bodyPr rtlCol="0" anchor="ctr"/>
+          <a:lstStyle/>
+          <a:p>
+            <a:pPr algn="ctr"/>
+          </a:p>
+        </p:txBody>
+      </p:sp>
+      <p:sp>
+        <p:nvSpPr>
+          <p:cNvPr id="14" name="TextBox 13"/>
+          <p:cNvSpPr txBox="1"/>
+          <p:nvPr/>
+        </p:nvSpPr>
+        <p:spPr>
+          <a:xfrm>
+            <a:off x="1417320" y="5861304"/>
+            <a:ext cx="6766560" cy="457200"/>
+          </a:xfrm>
+          <a:prstGeom prst="rect">
+            <a:avLst/>
+          </a:prstGeom>
+          <a:noFill/>
+        </p:spPr>
+        <p:txBody>
+          <a:bodyPr wrap="square" anchor="t" lIns="0" rIns="0" tIns="0" bIns="0">
+            <a:spAutoFit/>
+          </a:bodyPr>
+          <a:lstStyle/>
+          <a:p>
+            <a:pPr algn="l">
+              <a:lnSpc>
+                <a:spcPct val="115000"/>
+              </a:lnSpc>
+            </a:pPr>
+            <a:r>
+              <a:rPr sz="1600" b="0">
+                <a:solidFill>
+                  <a:srgbClr val="9CA3AF"/>
+                </a:solidFill>
+                <a:latin typeface="Segoe UI"/>
+              </a:rPr>
+              <a:t>Copia la fila y la pega en Softland, a mano</a:t>
+            </a:r>
+          </a:p>
+        </p:txBody>
+      </p:sp>
+      <p:sp>
+        <p:nvSpPr>
+          <p:cNvPr id="15" name="Rounded Rectangle 14"/>
           <p:cNvSpPr/>
           <p:nvPr/>
         </p:nvSpPr>
@@ -8525,7 +13217,7 @@
       </p:sp>
       <p:pic>
         <p:nvPicPr>
-          <p:cNvPr id="14" name="Picture 13" descr="qr.png"/>
+          <p:cNvPr id="16" name="Picture 15" descr="qr_admin.png"/>
           <p:cNvPicPr>
             <a:picLocks noChangeAspect="1"/>
           </p:cNvPicPr>
@@ -8549,7 +13241,7 @@
       </p:pic>
       <p:sp>
         <p:nvSpPr>
-          <p:cNvPr id="15" name="TextBox 14"/>
+          <p:cNvPr id="17" name="TextBox 16"/>
           <p:cNvSpPr txBox="1"/>
           <p:nvPr/>
         </p:nvSpPr>
@@ -8581,14 +13273,14 @@
                 </a:solidFill>
                 <a:latin typeface="Segoe UI"/>
               </a:rPr>
-              <a:t>Escanea para entrar</a:t>
-            </a:r>
-          </a:p>
-        </p:txBody>
-      </p:sp>
-      <p:sp>
-        <p:nvSpPr>
-          <p:cNvPr id="16" name="TextBox 15"/>
+              <a:t>Panel de administracion</a:t>
+            </a:r>
+          </a:p>
+        </p:txBody>
+      </p:sp>
+      <p:sp>
+        <p:nvSpPr>
+          <p:cNvPr id="18" name="TextBox 17"/>
           <p:cNvSpPr txBox="1"/>
           <p:nvPr/>
         </p:nvSpPr>
@@ -8614,13 +13306,13 @@
               </a:lnSpc>
             </a:pPr>
             <a:r>
-              <a:rPr sz="1100" b="0">
+              <a:rPr sz="1000" b="0">
                 <a:solidFill>
                   <a:srgbClr val="34D399"/>
                 </a:solidFill>
                 <a:latin typeface="Segoe UI"/>
               </a:rPr>
-              <a:t>liquidaciondeviajes.vercel.app</a:t>
+              <a:t>/admin/login</a:t>
             </a:r>
           </a:p>
         </p:txBody>
